--- a/topic-08-week8/unit-1/talk-02/talk1.pptx
+++ b/topic-08-week8/unit-1/talk-02/talk1.pptx
@@ -5,10 +5,10 @@
     <p:sldMasterId id="2147483648" r:id="rId1"/>
   </p:sldMasterIdLst>
   <p:notesMasterIdLst>
-    <p:notesMasterId r:id="rId18"/>
+    <p:notesMasterId r:id="rId26"/>
   </p:notesMasterIdLst>
   <p:sldIdLst>
-    <p:sldId id="256" r:id="rId2"/>
+    <p:sldId id="283" r:id="rId2"/>
     <p:sldId id="257" r:id="rId3"/>
     <p:sldId id="258" r:id="rId4"/>
     <p:sldId id="259" r:id="rId5"/>
@@ -20,10 +20,18 @@
     <p:sldId id="265" r:id="rId11"/>
     <p:sldId id="266" r:id="rId12"/>
     <p:sldId id="267" r:id="rId13"/>
-    <p:sldId id="268" r:id="rId14"/>
-    <p:sldId id="269" r:id="rId15"/>
-    <p:sldId id="270" r:id="rId16"/>
-    <p:sldId id="271" r:id="rId17"/>
+    <p:sldId id="270" r:id="rId14"/>
+    <p:sldId id="272" r:id="rId15"/>
+    <p:sldId id="273" r:id="rId16"/>
+    <p:sldId id="274" r:id="rId17"/>
+    <p:sldId id="275" r:id="rId18"/>
+    <p:sldId id="277" r:id="rId19"/>
+    <p:sldId id="276" r:id="rId20"/>
+    <p:sldId id="278" r:id="rId21"/>
+    <p:sldId id="279" r:id="rId22"/>
+    <p:sldId id="280" r:id="rId23"/>
+    <p:sldId id="282" r:id="rId24"/>
+    <p:sldId id="271" r:id="rId25"/>
   </p:sldIdLst>
   <p:sldSz cx="12192000" cy="6858000"/>
   <p:notesSz cx="6858000" cy="12192000"/>
@@ -317,7 +325,7 @@
           <a:p>
             <a:fld id="{F7021451-1387-4CA6-816F-3879F97B5CBC}" type="slidenum">
               <a:rPr lang="en-US"/>
-              <a:t>1</a:t>
+              <a:t>2</a:t>
             </a:fld>
             <a:endParaRPr lang="en-US"/>
           </a:p>
@@ -401,7 +409,7 @@
           <a:p>
             <a:fld id="{F7021451-1387-4CA6-816F-3879F97B5CBC}" type="slidenum">
               <a:rPr lang="en-US"/>
-              <a:t>10</a:t>
+              <a:t>11</a:t>
             </a:fld>
             <a:endParaRPr lang="en-US"/>
           </a:p>
@@ -485,7 +493,7 @@
           <a:p>
             <a:fld id="{F7021451-1387-4CA6-816F-3879F97B5CBC}" type="slidenum">
               <a:rPr lang="en-US"/>
-              <a:t>11</a:t>
+              <a:t>12</a:t>
             </a:fld>
             <a:endParaRPr lang="en-US"/>
           </a:p>
@@ -569,7 +577,7 @@
           <a:p>
             <a:fld id="{F7021451-1387-4CA6-816F-3879F97B5CBC}" type="slidenum">
               <a:rPr lang="en-US"/>
-              <a:t>12</a:t>
+              <a:t>13</a:t>
             </a:fld>
             <a:endParaRPr lang="en-US"/>
           </a:p>
@@ -615,7 +623,21 @@
             <p:ph type="sldImg"/>
           </p:nvPr>
         </p:nvSpPr>
-        <p:spPr/>
+        <p:spPr>
+          <a:xfrm>
+            <a:off x="-228600" y="1524000"/>
+            <a:ext cx="7315200" cy="4114800"/>
+          </a:xfrm>
+          <a:prstGeom prst="rect">
+            <a:avLst/>
+          </a:prstGeom>
+          <a:noFill/>
+          <a:ln w="12700">
+            <a:solidFill>
+              <a:prstClr val="black"/>
+            </a:solidFill>
+          </a:ln>
+        </p:spPr>
       </p:sp>
       <p:sp>
         <p:nvSpPr>
@@ -627,42 +649,35 @@
             <p:ph type="body" idx="1"/>
           </p:nvPr>
         </p:nvSpPr>
-        <p:spPr/>
+        <p:spPr>
+          <a:xfrm>
+            <a:off x="685800" y="5867400"/>
+            <a:ext cx="5486400" cy="4800600"/>
+          </a:xfrm>
+          <a:prstGeom prst="rect">
+            <a:avLst/>
+          </a:prstGeom>
+        </p:spPr>
         <p:txBody>
           <a:bodyPr/>
           <a:lstStyle/>
           <a:p>
-            <a:endParaRPr lang="en-US" dirty="0"/>
-          </a:p>
-        </p:txBody>
-      </p:sp>
-      <p:sp>
-        <p:nvSpPr>
-          <p:cNvPr id="4" name="Slide Number Placeholder 3"/>
-          <p:cNvSpPr>
-            <a:spLocks noGrp="1"/>
-          </p:cNvSpPr>
-          <p:nvPr>
-            <p:ph type="sldNum" sz="quarter" idx="10"/>
-          </p:nvPr>
-        </p:nvSpPr>
-        <p:spPr/>
-        <p:txBody>
-          <a:bodyPr/>
-          <a:lstStyle/>
-          <a:p>
-            <a:fld id="{F7021451-1387-4CA6-816F-3879F97B5CBC}" type="slidenum">
-              <a:rPr lang="en-US"/>
-              <a:t>13</a:t>
-            </a:fld>
-            <a:endParaRPr lang="en-US"/>
+            <a:r>
+              <a:rPr lang="en-GB" b="1" dirty="0"/>
+              <a:t>describe, propose, or standardize</a:t>
+            </a:r>
+            <a:r>
+              <a:rPr lang="en-GB" dirty="0"/>
+              <a:t> aspects of the internet and computer networking.</a:t>
+            </a:r>
+            <a:endParaRPr lang="en-IE" dirty="0"/>
           </a:p>
         </p:txBody>
       </p:sp>
     </p:spTree>
     <p:extLst>
       <p:ext uri="{BB962C8B-B14F-4D97-AF65-F5344CB8AC3E}">
-        <p14:creationId xmlns:p14="http://schemas.microsoft.com/office/powerpoint/2010/main" val="1024086991"/>
+        <p14:creationId xmlns:p14="http://schemas.microsoft.com/office/powerpoint/2010/main" val="1981502496"/>
       </p:ext>
     </p:extLst>
   </p:cSld>
@@ -673,6 +688,540 @@
 </file>
 
 <file path=ppt/notesSlides/notesSlide14.xml><?xml version="1.0" encoding="utf-8"?>
+<p:notes xmlns:a="http://schemas.openxmlformats.org/drawingml/2006/main" xmlns:r="http://schemas.openxmlformats.org/officeDocument/2006/relationships" xmlns:p="http://schemas.openxmlformats.org/presentationml/2006/main">
+  <p:cSld>
+    <p:spTree>
+      <p:nvGrpSpPr>
+        <p:cNvPr id="1" name=""/>
+        <p:cNvGrpSpPr/>
+        <p:nvPr/>
+      </p:nvGrpSpPr>
+      <p:grpSpPr>
+        <a:xfrm>
+          <a:off x="0" y="0"/>
+          <a:ext cx="0" cy="0"/>
+          <a:chOff x="0" y="0"/>
+          <a:chExt cx="0" cy="0"/>
+        </a:xfrm>
+      </p:grpSpPr>
+      <p:sp>
+        <p:nvSpPr>
+          <p:cNvPr id="2" name="Slide Image Placeholder 1"/>
+          <p:cNvSpPr>
+            <a:spLocks noGrp="1" noRot="1" noChangeAspect="1"/>
+          </p:cNvSpPr>
+          <p:nvPr>
+            <p:ph type="sldImg"/>
+          </p:nvPr>
+        </p:nvSpPr>
+        <p:spPr>
+          <a:xfrm>
+            <a:off x="-228600" y="1524000"/>
+            <a:ext cx="7315200" cy="4114800"/>
+          </a:xfrm>
+          <a:prstGeom prst="rect">
+            <a:avLst/>
+          </a:prstGeom>
+          <a:noFill/>
+          <a:ln w="12700">
+            <a:solidFill>
+              <a:prstClr val="black"/>
+            </a:solidFill>
+          </a:ln>
+        </p:spPr>
+      </p:sp>
+      <p:sp>
+        <p:nvSpPr>
+          <p:cNvPr id="3" name="Notes Placeholder 2"/>
+          <p:cNvSpPr>
+            <a:spLocks noGrp="1"/>
+          </p:cNvSpPr>
+          <p:nvPr>
+            <p:ph type="body" idx="1"/>
+          </p:nvPr>
+        </p:nvSpPr>
+        <p:spPr>
+          <a:xfrm>
+            <a:off x="685800" y="5867400"/>
+            <a:ext cx="5486400" cy="4800600"/>
+          </a:xfrm>
+          <a:prstGeom prst="rect">
+            <a:avLst/>
+          </a:prstGeom>
+        </p:spPr>
+        <p:txBody>
+          <a:bodyPr/>
+          <a:lstStyle/>
+          <a:p>
+            <a:r>
+              <a:rPr lang="en-GB" dirty="0" err="1"/>
+              <a:t>mDNS</a:t>
+            </a:r>
+            <a:r>
+              <a:rPr lang="en-GB" dirty="0"/>
+              <a:t> relies on </a:t>
+            </a:r>
+            <a:r>
+              <a:rPr lang="en-GB" b="1" dirty="0"/>
+              <a:t>link-local multicast</a:t>
+            </a:r>
+            <a:r>
+              <a:rPr lang="en-GB" dirty="0"/>
+              <a:t> — a special kind of IP address used only within a local network segment.</a:t>
+            </a:r>
+          </a:p>
+          <a:p>
+            <a:r>
+              <a:rPr lang="en-GB" dirty="0"/>
+              <a:t>These addresses are reserved for </a:t>
+            </a:r>
+            <a:r>
+              <a:rPr lang="en-GB" dirty="0" err="1"/>
+              <a:t>mDNS</a:t>
+            </a:r>
+            <a:r>
+              <a:rPr lang="en-GB" dirty="0"/>
+              <a:t> traffic — routers </a:t>
+            </a:r>
+            <a:r>
+              <a:rPr lang="en-GB" b="1" dirty="0"/>
+              <a:t>do not forward</a:t>
+            </a:r>
+            <a:r>
+              <a:rPr lang="en-GB" dirty="0"/>
+              <a:t> them, meaning </a:t>
+            </a:r>
+            <a:r>
+              <a:rPr lang="en-GB" dirty="0" err="1"/>
+              <a:t>mDNS</a:t>
+            </a:r>
+            <a:r>
+              <a:rPr lang="en-GB" dirty="0"/>
+              <a:t> only works within a single LAN/VLAN.</a:t>
+            </a:r>
+            <a:br>
+              <a:rPr lang="en-GB" dirty="0"/>
+            </a:br>
+            <a:r>
+              <a:rPr lang="en-GB" dirty="0"/>
+              <a:t>Let’s say your laptop wants to resolve </a:t>
+            </a:r>
+            <a:r>
+              <a:rPr lang="en-GB" sz="1200" kern="1200" dirty="0" err="1">
+                <a:solidFill>
+                  <a:schemeClr val="tx1"/>
+                </a:solidFill>
+                <a:latin typeface="+mn-lt"/>
+                <a:ea typeface="+mn-ea"/>
+                <a:cs typeface="+mn-cs"/>
+              </a:rPr>
+              <a:t>raspberrypi.local</a:t>
+            </a:r>
+            <a:r>
+              <a:rPr lang="en-GB" dirty="0"/>
+              <a:t>:</a:t>
+            </a:r>
+          </a:p>
+          <a:p>
+            <a:r>
+              <a:rPr lang="en-GB" b="1" dirty="0"/>
+              <a:t>Query sent via multicast:</a:t>
+            </a:r>
+            <a:br>
+              <a:rPr lang="en-GB" dirty="0"/>
+            </a:br>
+            <a:r>
+              <a:rPr lang="en-GB" dirty="0"/>
+              <a:t>Your laptop sends a UDP packet to </a:t>
+            </a:r>
+            <a:r>
+              <a:rPr lang="en-GB" sz="1200" kern="1200" dirty="0">
+                <a:solidFill>
+                  <a:schemeClr val="tx1"/>
+                </a:solidFill>
+                <a:latin typeface="+mn-lt"/>
+                <a:ea typeface="+mn-ea"/>
+                <a:cs typeface="+mn-cs"/>
+              </a:rPr>
+              <a:t>224.0.0.251:5353</a:t>
+            </a:r>
+            <a:r>
+              <a:rPr lang="en-GB" dirty="0"/>
+              <a:t> asking,</a:t>
+            </a:r>
+            <a:br>
+              <a:rPr lang="en-GB" dirty="0"/>
+            </a:br>
+            <a:r>
+              <a:rPr lang="en-GB" dirty="0"/>
+              <a:t>“Who has </a:t>
+            </a:r>
+            <a:r>
+              <a:rPr lang="en-GB" sz="1200" kern="1200" dirty="0" err="1">
+                <a:solidFill>
+                  <a:schemeClr val="tx1"/>
+                </a:solidFill>
+                <a:latin typeface="+mn-lt"/>
+                <a:ea typeface="+mn-ea"/>
+                <a:cs typeface="+mn-cs"/>
+              </a:rPr>
+              <a:t>raspberrypi.local</a:t>
+            </a:r>
+            <a:r>
+              <a:rPr lang="en-GB" dirty="0"/>
+              <a:t>?”</a:t>
+            </a:r>
+          </a:p>
+          <a:p>
+            <a:r>
+              <a:rPr lang="en-GB" b="1" dirty="0"/>
+              <a:t>All devices on the LAN receive it:</a:t>
+            </a:r>
+            <a:br>
+              <a:rPr lang="en-GB" dirty="0"/>
+            </a:br>
+            <a:r>
+              <a:rPr lang="en-GB" dirty="0"/>
+              <a:t>Every device listening on that multicast group gets the query.</a:t>
+            </a:r>
+          </a:p>
+          <a:p>
+            <a:r>
+              <a:rPr lang="en-GB" b="1" dirty="0"/>
+              <a:t>The Raspberry Pi recognizes its name:</a:t>
+            </a:r>
+            <a:br>
+              <a:rPr lang="en-GB" dirty="0"/>
+            </a:br>
+            <a:r>
+              <a:rPr lang="en-GB" dirty="0"/>
+              <a:t>It replies </a:t>
+            </a:r>
+            <a:r>
+              <a:rPr lang="en-GB" b="1" dirty="0"/>
+              <a:t>directly via multicast</a:t>
+            </a:r>
+            <a:r>
+              <a:rPr lang="en-GB" dirty="0"/>
+              <a:t> (or sometimes unicast) with a response like:</a:t>
+            </a:r>
+          </a:p>
+          <a:p>
+            <a:br>
+              <a:rPr lang="en-IE" dirty="0"/>
+            </a:br>
+            <a:r>
+              <a:rPr lang="en-GB" dirty="0"/>
+              <a:t>A </a:t>
+            </a:r>
+            <a:r>
+              <a:rPr lang="en-GB" b="1" dirty="0"/>
+              <a:t>QM question</a:t>
+            </a:r>
+            <a:r>
+              <a:rPr lang="en-GB" dirty="0"/>
+              <a:t> tells all devices:</a:t>
+            </a:r>
+          </a:p>
+          <a:p>
+            <a:r>
+              <a:rPr lang="en-GB" dirty="0"/>
+              <a:t>“Who has </a:t>
+            </a:r>
+            <a:r>
+              <a:rPr lang="en-GB" sz="1200" kern="1200" dirty="0" err="1">
+                <a:solidFill>
+                  <a:schemeClr val="tx1"/>
+                </a:solidFill>
+                <a:latin typeface="+mn-lt"/>
+                <a:ea typeface="+mn-ea"/>
+                <a:cs typeface="+mn-cs"/>
+              </a:rPr>
+              <a:t>raspberrypi.local</a:t>
+            </a:r>
+            <a:r>
+              <a:rPr lang="en-GB" dirty="0"/>
+              <a:t>? Please respond to everyone.”</a:t>
+            </a:r>
+            <a:br>
+              <a:rPr lang="en-GB" dirty="0"/>
+            </a:br>
+            <a:r>
+              <a:rPr lang="en-GB" dirty="0"/>
+              <a:t>This is useful for discovery — e.g., when a new device joins the network.</a:t>
+            </a:r>
+          </a:p>
+          <a:p>
+            <a:r>
+              <a:rPr lang="en-GB" dirty="0"/>
+              <a:t>A </a:t>
+            </a:r>
+            <a:r>
+              <a:rPr lang="en-GB" b="1" dirty="0"/>
+              <a:t>QU question</a:t>
+            </a:r>
+            <a:r>
+              <a:rPr lang="en-GB" dirty="0"/>
+              <a:t> says:</a:t>
+            </a:r>
+          </a:p>
+          <a:p>
+            <a:r>
+              <a:rPr lang="en-GB" dirty="0"/>
+              <a:t>“Who has </a:t>
+            </a:r>
+            <a:r>
+              <a:rPr lang="en-GB" sz="1200" kern="1200" dirty="0" err="1">
+                <a:solidFill>
+                  <a:schemeClr val="tx1"/>
+                </a:solidFill>
+                <a:latin typeface="+mn-lt"/>
+                <a:ea typeface="+mn-ea"/>
+                <a:cs typeface="+mn-cs"/>
+              </a:rPr>
+              <a:t>raspberrypi.local</a:t>
+            </a:r>
+            <a:r>
+              <a:rPr lang="en-GB" dirty="0"/>
+              <a:t>? But reply directly to me, not to the whole multicast group.”</a:t>
+            </a:r>
+            <a:br>
+              <a:rPr lang="en-GB" dirty="0"/>
+            </a:br>
+            <a:r>
+              <a:rPr lang="en-GB" dirty="0"/>
+              <a:t>This reduces traffic, especially when a host already knows who might respond.</a:t>
+            </a:r>
+          </a:p>
+          <a:p>
+            <a:endParaRPr lang="en-IE" dirty="0"/>
+          </a:p>
+        </p:txBody>
+      </p:sp>
+    </p:spTree>
+    <p:extLst>
+      <p:ext uri="{BB962C8B-B14F-4D97-AF65-F5344CB8AC3E}">
+        <p14:creationId xmlns:p14="http://schemas.microsoft.com/office/powerpoint/2010/main" val="2921440191"/>
+      </p:ext>
+    </p:extLst>
+  </p:cSld>
+  <p:clrMapOvr>
+    <a:masterClrMapping/>
+  </p:clrMapOvr>
+</p:notes>
+</file>
+
+<file path=ppt/notesSlides/notesSlide15.xml><?xml version="1.0" encoding="utf-8"?>
+<p:notes xmlns:a="http://schemas.openxmlformats.org/drawingml/2006/main" xmlns:r="http://schemas.openxmlformats.org/officeDocument/2006/relationships" xmlns:p="http://schemas.openxmlformats.org/presentationml/2006/main">
+  <p:cSld>
+    <p:spTree>
+      <p:nvGrpSpPr>
+        <p:cNvPr id="1" name=""/>
+        <p:cNvGrpSpPr/>
+        <p:nvPr/>
+      </p:nvGrpSpPr>
+      <p:grpSpPr>
+        <a:xfrm>
+          <a:off x="0" y="0"/>
+          <a:ext cx="0" cy="0"/>
+          <a:chOff x="0" y="0"/>
+          <a:chExt cx="0" cy="0"/>
+        </a:xfrm>
+      </p:grpSpPr>
+      <p:sp>
+        <p:nvSpPr>
+          <p:cNvPr id="2" name="Slide Image Placeholder 1"/>
+          <p:cNvSpPr>
+            <a:spLocks noGrp="1" noRot="1" noChangeAspect="1"/>
+          </p:cNvSpPr>
+          <p:nvPr>
+            <p:ph type="sldImg"/>
+          </p:nvPr>
+        </p:nvSpPr>
+        <p:spPr>
+          <a:xfrm>
+            <a:off x="-228600" y="1524000"/>
+            <a:ext cx="7315200" cy="4114800"/>
+          </a:xfrm>
+          <a:prstGeom prst="rect">
+            <a:avLst/>
+          </a:prstGeom>
+          <a:noFill/>
+          <a:ln w="12700">
+            <a:solidFill>
+              <a:prstClr val="black"/>
+            </a:solidFill>
+          </a:ln>
+        </p:spPr>
+      </p:sp>
+      <p:sp>
+        <p:nvSpPr>
+          <p:cNvPr id="3" name="Notes Placeholder 2"/>
+          <p:cNvSpPr>
+            <a:spLocks noGrp="1"/>
+          </p:cNvSpPr>
+          <p:nvPr>
+            <p:ph type="body" idx="1"/>
+          </p:nvPr>
+        </p:nvSpPr>
+        <p:spPr>
+          <a:xfrm>
+            <a:off x="685800" y="5867400"/>
+            <a:ext cx="5486400" cy="4800600"/>
+          </a:xfrm>
+          <a:prstGeom prst="rect">
+            <a:avLst/>
+          </a:prstGeom>
+        </p:spPr>
+        <p:txBody>
+          <a:bodyPr/>
+          <a:lstStyle/>
+          <a:p>
+            <a:r>
+              <a:rPr lang="en-GB" dirty="0"/>
+              <a:t>“Who provides an HTTP service?”</a:t>
+            </a:r>
+            <a:br>
+              <a:rPr lang="en-GB" dirty="0"/>
+            </a:br>
+            <a:r>
+              <a:rPr lang="en-GB" dirty="0"/>
+              <a:t>“Is there a printer here?”</a:t>
+            </a:r>
+            <a:br>
+              <a:rPr lang="en-GB" dirty="0"/>
+            </a:br>
+            <a:r>
+              <a:rPr lang="en-GB" dirty="0"/>
+              <a:t>“What devices offer </a:t>
+            </a:r>
+            <a:r>
+              <a:rPr lang="en-GB" sz="1200" kern="1200" dirty="0">
+                <a:solidFill>
+                  <a:schemeClr val="tx1"/>
+                </a:solidFill>
+                <a:latin typeface="+mn-lt"/>
+                <a:ea typeface="+mn-ea"/>
+                <a:cs typeface="+mn-cs"/>
+              </a:rPr>
+              <a:t>_ssh._</a:t>
+            </a:r>
+            <a:r>
+              <a:rPr lang="en-GB" sz="1200" kern="1200" dirty="0" err="1">
+                <a:solidFill>
+                  <a:schemeClr val="tx1"/>
+                </a:solidFill>
+                <a:latin typeface="+mn-lt"/>
+                <a:ea typeface="+mn-ea"/>
+                <a:cs typeface="+mn-cs"/>
+              </a:rPr>
+              <a:t>tcp.local</a:t>
+            </a:r>
+            <a:r>
+              <a:rPr lang="en-GB" dirty="0"/>
+              <a:t>?”</a:t>
+            </a:r>
+            <a:endParaRPr lang="en-IE" dirty="0"/>
+          </a:p>
+        </p:txBody>
+      </p:sp>
+    </p:spTree>
+    <p:extLst>
+      <p:ext uri="{BB962C8B-B14F-4D97-AF65-F5344CB8AC3E}">
+        <p14:creationId xmlns:p14="http://schemas.microsoft.com/office/powerpoint/2010/main" val="582783222"/>
+      </p:ext>
+    </p:extLst>
+  </p:cSld>
+  <p:clrMapOvr>
+    <a:masterClrMapping/>
+  </p:clrMapOvr>
+</p:notes>
+</file>
+
+<file path=ppt/notesSlides/notesSlide16.xml><?xml version="1.0" encoding="utf-8"?>
+<p:notes xmlns:a="http://schemas.openxmlformats.org/drawingml/2006/main" xmlns:r="http://schemas.openxmlformats.org/officeDocument/2006/relationships" xmlns:p="http://schemas.openxmlformats.org/presentationml/2006/main">
+  <p:cSld>
+    <p:spTree>
+      <p:nvGrpSpPr>
+        <p:cNvPr id="1" name=""/>
+        <p:cNvGrpSpPr/>
+        <p:nvPr/>
+      </p:nvGrpSpPr>
+      <p:grpSpPr>
+        <a:xfrm>
+          <a:off x="0" y="0"/>
+          <a:ext cx="0" cy="0"/>
+          <a:chOff x="0" y="0"/>
+          <a:chExt cx="0" cy="0"/>
+        </a:xfrm>
+      </p:grpSpPr>
+      <p:sp>
+        <p:nvSpPr>
+          <p:cNvPr id="2" name="Slide Image Placeholder 1"/>
+          <p:cNvSpPr>
+            <a:spLocks noGrp="1" noRot="1" noChangeAspect="1"/>
+          </p:cNvSpPr>
+          <p:nvPr>
+            <p:ph type="sldImg"/>
+          </p:nvPr>
+        </p:nvSpPr>
+        <p:spPr>
+          <a:xfrm>
+            <a:off x="-228600" y="1524000"/>
+            <a:ext cx="7315200" cy="4114800"/>
+          </a:xfrm>
+          <a:prstGeom prst="rect">
+            <a:avLst/>
+          </a:prstGeom>
+          <a:noFill/>
+          <a:ln w="12700">
+            <a:solidFill>
+              <a:prstClr val="black"/>
+            </a:solidFill>
+          </a:ln>
+        </p:spPr>
+      </p:sp>
+      <p:sp>
+        <p:nvSpPr>
+          <p:cNvPr id="3" name="Notes Placeholder 2"/>
+          <p:cNvSpPr>
+            <a:spLocks noGrp="1"/>
+          </p:cNvSpPr>
+          <p:nvPr>
+            <p:ph type="body" idx="1"/>
+          </p:nvPr>
+        </p:nvSpPr>
+        <p:spPr>
+          <a:xfrm>
+            <a:off x="685800" y="5867400"/>
+            <a:ext cx="5486400" cy="4800600"/>
+          </a:xfrm>
+          <a:prstGeom prst="rect">
+            <a:avLst/>
+          </a:prstGeom>
+        </p:spPr>
+        <p:txBody>
+          <a:bodyPr/>
+          <a:lstStyle/>
+          <a:p>
+            <a:endParaRPr lang="en-IE" dirty="0"/>
+          </a:p>
+        </p:txBody>
+      </p:sp>
+    </p:spTree>
+    <p:extLst>
+      <p:ext uri="{BB962C8B-B14F-4D97-AF65-F5344CB8AC3E}">
+        <p14:creationId xmlns:p14="http://schemas.microsoft.com/office/powerpoint/2010/main" val="2373288816"/>
+      </p:ext>
+    </p:extLst>
+  </p:cSld>
+  <p:clrMapOvr>
+    <a:masterClrMapping/>
+  </p:clrMapOvr>
+</p:notes>
+</file>
+
+<file path=ppt/notesSlides/notesSlide17.xml><?xml version="1.0" encoding="utf-8"?>
 <p:notes xmlns:a="http://schemas.openxmlformats.org/drawingml/2006/main" xmlns:r="http://schemas.openxmlformats.org/officeDocument/2006/relationships" xmlns:p="http://schemas.openxmlformats.org/presentationml/2006/main">
   <p:cSld>
     <p:spTree>
@@ -737,175 +1286,7 @@
           <a:p>
             <a:fld id="{F7021451-1387-4CA6-816F-3879F97B5CBC}" type="slidenum">
               <a:rPr lang="en-US"/>
-              <a:t>14</a:t>
-            </a:fld>
-            <a:endParaRPr lang="en-US"/>
-          </a:p>
-        </p:txBody>
-      </p:sp>
-    </p:spTree>
-    <p:extLst>
-      <p:ext uri="{BB962C8B-B14F-4D97-AF65-F5344CB8AC3E}">
-        <p14:creationId xmlns:p14="http://schemas.microsoft.com/office/powerpoint/2010/main" val="1024086991"/>
-      </p:ext>
-    </p:extLst>
-  </p:cSld>
-  <p:clrMapOvr>
-    <a:masterClrMapping/>
-  </p:clrMapOvr>
-</p:notes>
-</file>
-
-<file path=ppt/notesSlides/notesSlide15.xml><?xml version="1.0" encoding="utf-8"?>
-<p:notes xmlns:a="http://schemas.openxmlformats.org/drawingml/2006/main" xmlns:r="http://schemas.openxmlformats.org/officeDocument/2006/relationships" xmlns:p="http://schemas.openxmlformats.org/presentationml/2006/main">
-  <p:cSld>
-    <p:spTree>
-      <p:nvGrpSpPr>
-        <p:cNvPr id="1" name=""/>
-        <p:cNvGrpSpPr/>
-        <p:nvPr/>
-      </p:nvGrpSpPr>
-      <p:grpSpPr>
-        <a:xfrm>
-          <a:off x="0" y="0"/>
-          <a:ext cx="0" cy="0"/>
-          <a:chOff x="0" y="0"/>
-          <a:chExt cx="0" cy="0"/>
-        </a:xfrm>
-      </p:grpSpPr>
-      <p:sp>
-        <p:nvSpPr>
-          <p:cNvPr id="2" name="Slide Image Placeholder 1"/>
-          <p:cNvSpPr>
-            <a:spLocks noGrp="1" noRot="1" noChangeAspect="1"/>
-          </p:cNvSpPr>
-          <p:nvPr>
-            <p:ph type="sldImg"/>
-          </p:nvPr>
-        </p:nvSpPr>
-        <p:spPr/>
-      </p:sp>
-      <p:sp>
-        <p:nvSpPr>
-          <p:cNvPr id="3" name="Notes Placeholder 2"/>
-          <p:cNvSpPr>
-            <a:spLocks noGrp="1"/>
-          </p:cNvSpPr>
-          <p:nvPr>
-            <p:ph type="body" idx="1"/>
-          </p:nvPr>
-        </p:nvSpPr>
-        <p:spPr/>
-        <p:txBody>
-          <a:bodyPr/>
-          <a:lstStyle/>
-          <a:p>
-            <a:endParaRPr lang="en-US" dirty="0"/>
-          </a:p>
-        </p:txBody>
-      </p:sp>
-      <p:sp>
-        <p:nvSpPr>
-          <p:cNvPr id="4" name="Slide Number Placeholder 3"/>
-          <p:cNvSpPr>
-            <a:spLocks noGrp="1"/>
-          </p:cNvSpPr>
-          <p:nvPr>
-            <p:ph type="sldNum" sz="quarter" idx="10"/>
-          </p:nvPr>
-        </p:nvSpPr>
-        <p:spPr/>
-        <p:txBody>
-          <a:bodyPr/>
-          <a:lstStyle/>
-          <a:p>
-            <a:fld id="{F7021451-1387-4CA6-816F-3879F97B5CBC}" type="slidenum">
-              <a:rPr lang="en-US"/>
-              <a:t>15</a:t>
-            </a:fld>
-            <a:endParaRPr lang="en-US"/>
-          </a:p>
-        </p:txBody>
-      </p:sp>
-    </p:spTree>
-    <p:extLst>
-      <p:ext uri="{BB962C8B-B14F-4D97-AF65-F5344CB8AC3E}">
-        <p14:creationId xmlns:p14="http://schemas.microsoft.com/office/powerpoint/2010/main" val="1024086991"/>
-      </p:ext>
-    </p:extLst>
-  </p:cSld>
-  <p:clrMapOvr>
-    <a:masterClrMapping/>
-  </p:clrMapOvr>
-</p:notes>
-</file>
-
-<file path=ppt/notesSlides/notesSlide16.xml><?xml version="1.0" encoding="utf-8"?>
-<p:notes xmlns:a="http://schemas.openxmlformats.org/drawingml/2006/main" xmlns:r="http://schemas.openxmlformats.org/officeDocument/2006/relationships" xmlns:p="http://schemas.openxmlformats.org/presentationml/2006/main">
-  <p:cSld>
-    <p:spTree>
-      <p:nvGrpSpPr>
-        <p:cNvPr id="1" name=""/>
-        <p:cNvGrpSpPr/>
-        <p:nvPr/>
-      </p:nvGrpSpPr>
-      <p:grpSpPr>
-        <a:xfrm>
-          <a:off x="0" y="0"/>
-          <a:ext cx="0" cy="0"/>
-          <a:chOff x="0" y="0"/>
-          <a:chExt cx="0" cy="0"/>
-        </a:xfrm>
-      </p:grpSpPr>
-      <p:sp>
-        <p:nvSpPr>
-          <p:cNvPr id="2" name="Slide Image Placeholder 1"/>
-          <p:cNvSpPr>
-            <a:spLocks noGrp="1" noRot="1" noChangeAspect="1"/>
-          </p:cNvSpPr>
-          <p:nvPr>
-            <p:ph type="sldImg"/>
-          </p:nvPr>
-        </p:nvSpPr>
-        <p:spPr/>
-      </p:sp>
-      <p:sp>
-        <p:nvSpPr>
-          <p:cNvPr id="3" name="Notes Placeholder 2"/>
-          <p:cNvSpPr>
-            <a:spLocks noGrp="1"/>
-          </p:cNvSpPr>
-          <p:nvPr>
-            <p:ph type="body" idx="1"/>
-          </p:nvPr>
-        </p:nvSpPr>
-        <p:spPr/>
-        <p:txBody>
-          <a:bodyPr/>
-          <a:lstStyle/>
-          <a:p>
-            <a:endParaRPr lang="en-US" dirty="0"/>
-          </a:p>
-        </p:txBody>
-      </p:sp>
-      <p:sp>
-        <p:nvSpPr>
-          <p:cNvPr id="4" name="Slide Number Placeholder 3"/>
-          <p:cNvSpPr>
-            <a:spLocks noGrp="1"/>
-          </p:cNvSpPr>
-          <p:nvPr>
-            <p:ph type="sldNum" sz="quarter" idx="10"/>
-          </p:nvPr>
-        </p:nvSpPr>
-        <p:spPr/>
-        <p:txBody>
-          <a:bodyPr/>
-          <a:lstStyle/>
-          <a:p>
-            <a:fld id="{F7021451-1387-4CA6-816F-3879F97B5CBC}" type="slidenum">
-              <a:rPr lang="en-US"/>
-              <a:t>16</a:t>
+              <a:t>24</a:t>
             </a:fld>
             <a:endParaRPr lang="en-US"/>
           </a:p>
@@ -989,7 +1370,7 @@
           <a:p>
             <a:fld id="{F7021451-1387-4CA6-816F-3879F97B5CBC}" type="slidenum">
               <a:rPr lang="en-US"/>
-              <a:t>2</a:t>
+              <a:t>3</a:t>
             </a:fld>
             <a:endParaRPr lang="en-US"/>
           </a:p>
@@ -1073,7 +1454,7 @@
           <a:p>
             <a:fld id="{F7021451-1387-4CA6-816F-3879F97B5CBC}" type="slidenum">
               <a:rPr lang="en-US"/>
-              <a:t>3</a:t>
+              <a:t>4</a:t>
             </a:fld>
             <a:endParaRPr lang="en-US"/>
           </a:p>
@@ -1157,7 +1538,7 @@
           <a:p>
             <a:fld id="{F7021451-1387-4CA6-816F-3879F97B5CBC}" type="slidenum">
               <a:rPr lang="en-US"/>
-              <a:t>4</a:t>
+              <a:t>5</a:t>
             </a:fld>
             <a:endParaRPr lang="en-US"/>
           </a:p>
@@ -1220,6 +1601,154 @@
           <a:bodyPr/>
           <a:lstStyle/>
           <a:p>
+            <a:r>
+              <a:rPr lang="en-GB" dirty="0"/>
+              <a:t>In SSH, the server sends its public key to the client during the </a:t>
+            </a:r>
+            <a:r>
+              <a:rPr lang="en-GB" b="1" dirty="0"/>
+              <a:t>key exchange process</a:t>
+            </a:r>
+            <a:r>
+              <a:rPr lang="en-GB" dirty="0"/>
+              <a:t>, which occurs right after the connection is initiated and before any sensitive data (such as authentication credentials) is transmitted. Here’s how and why this happens:</a:t>
+            </a:r>
+          </a:p>
+          <a:p>
+            <a:pPr>
+              <a:buFont typeface="+mj-lt"/>
+              <a:buAutoNum type="arabicPeriod"/>
+            </a:pPr>
+            <a:r>
+              <a:rPr lang="en-GB" b="1" dirty="0"/>
+              <a:t>Initial Connection and Key Exchange</a:t>
+            </a:r>
+            <a:r>
+              <a:rPr lang="en-GB" dirty="0"/>
+              <a:t>:</a:t>
+            </a:r>
+          </a:p>
+          <a:p>
+            <a:pPr marL="742950" lvl="1" indent="-285750">
+              <a:buFont typeface="+mj-lt"/>
+              <a:buAutoNum type="arabicPeriod"/>
+            </a:pPr>
+            <a:r>
+              <a:rPr lang="en-GB" dirty="0"/>
+              <a:t>When the SSH client connects to the server, they agree on the key exchange algorithm to use, like Diffie-Hellman.</a:t>
+            </a:r>
+          </a:p>
+          <a:p>
+            <a:pPr marL="742950" lvl="1" indent="-285750">
+              <a:buFont typeface="+mj-lt"/>
+              <a:buAutoNum type="arabicPeriod"/>
+            </a:pPr>
+            <a:r>
+              <a:rPr lang="en-GB" dirty="0"/>
+              <a:t>As part of this process, the server sends its </a:t>
+            </a:r>
+            <a:r>
+              <a:rPr lang="en-GB" b="1" dirty="0"/>
+              <a:t>public host key</a:t>
+            </a:r>
+            <a:r>
+              <a:rPr lang="en-GB" dirty="0"/>
+              <a:t> to the client. This key is unique to the server and acts as an identifier to help the client verify that it is connecting to the legitimate server.</a:t>
+            </a:r>
+          </a:p>
+          <a:p>
+            <a:pPr>
+              <a:buFont typeface="+mj-lt"/>
+              <a:buAutoNum type="arabicPeriod"/>
+            </a:pPr>
+            <a:r>
+              <a:rPr lang="en-GB" b="1" dirty="0"/>
+              <a:t>Host Key Verification</a:t>
+            </a:r>
+            <a:r>
+              <a:rPr lang="en-GB" dirty="0"/>
+              <a:t>:</a:t>
+            </a:r>
+          </a:p>
+          <a:p>
+            <a:pPr marL="742950" lvl="1" indent="-285750">
+              <a:buFont typeface="+mj-lt"/>
+              <a:buAutoNum type="arabicPeriod"/>
+            </a:pPr>
+            <a:r>
+              <a:rPr lang="en-GB" dirty="0"/>
+              <a:t>When the client receives the server’s public host key, it checks this key against a known hosts list (usually stored in the client’s ~/.ssh/</a:t>
+            </a:r>
+            <a:r>
+              <a:rPr lang="en-GB" dirty="0" err="1"/>
+              <a:t>known_hosts</a:t>
+            </a:r>
+            <a:r>
+              <a:rPr lang="en-GB" dirty="0"/>
+              <a:t> file).</a:t>
+            </a:r>
+          </a:p>
+          <a:p>
+            <a:pPr marL="742950" lvl="1" indent="-285750">
+              <a:buFont typeface="+mj-lt"/>
+              <a:buAutoNum type="arabicPeriod"/>
+            </a:pPr>
+            <a:r>
+              <a:rPr lang="en-GB" dirty="0"/>
+              <a:t>If the key matches an entry in this file, the client assumes it’s connecting to the legitimate server. If not, the client may issue a warning, and the user can choose to proceed or cancel the connection.</a:t>
+            </a:r>
+          </a:p>
+          <a:p>
+            <a:pPr marL="742950" lvl="1" indent="-285750">
+              <a:buFont typeface="+mj-lt"/>
+              <a:buAutoNum type="arabicPeriod"/>
+            </a:pPr>
+            <a:r>
+              <a:rPr lang="en-GB" dirty="0"/>
+              <a:t>This verification helps protect against </a:t>
+            </a:r>
+            <a:r>
+              <a:rPr lang="en-GB" b="1" dirty="0"/>
+              <a:t>man-in-the-middle attacks</a:t>
+            </a:r>
+            <a:r>
+              <a:rPr lang="en-GB" dirty="0"/>
+              <a:t> by ensuring that the client is not connecting to a malicious server impersonating the legitimate one.</a:t>
+            </a:r>
+          </a:p>
+          <a:p>
+            <a:pPr>
+              <a:buFont typeface="+mj-lt"/>
+              <a:buAutoNum type="arabicPeriod"/>
+            </a:pPr>
+            <a:r>
+              <a:rPr lang="en-GB" b="1" dirty="0"/>
+              <a:t>Symmetric Key Generation</a:t>
+            </a:r>
+            <a:r>
+              <a:rPr lang="en-GB" dirty="0"/>
+              <a:t>:</a:t>
+            </a:r>
+          </a:p>
+          <a:p>
+            <a:pPr marL="742950" lvl="1" indent="-285750">
+              <a:buFont typeface="+mj-lt"/>
+              <a:buAutoNum type="arabicPeriod"/>
+            </a:pPr>
+            <a:r>
+              <a:rPr lang="en-GB" dirty="0"/>
+              <a:t>After the server’s public key is verified, the client and server use the agreed-upon key exchange algorithm to generate a </a:t>
+            </a:r>
+            <a:r>
+              <a:rPr lang="en-GB" b="1" dirty="0"/>
+              <a:t>shared secret</a:t>
+            </a:r>
+            <a:r>
+              <a:rPr lang="en-GB" dirty="0"/>
+              <a:t> based on each other’s public information. This shared secret will be used to create symmetric encryption keys for the session.</a:t>
+            </a:r>
+          </a:p>
+          <a:p>
             <a:endParaRPr lang="en-US" dirty="0"/>
           </a:p>
         </p:txBody>
@@ -1241,7 +1770,7 @@
           <a:p>
             <a:fld id="{F7021451-1387-4CA6-816F-3879F97B5CBC}" type="slidenum">
               <a:rPr lang="en-US"/>
-              <a:t>5</a:t>
+              <a:t>6</a:t>
             </a:fld>
             <a:endParaRPr lang="en-US"/>
           </a:p>
@@ -1304,154 +1833,6 @@
           <a:bodyPr/>
           <a:lstStyle/>
           <a:p>
-            <a:r>
-              <a:rPr lang="en-GB" dirty="0"/>
-              <a:t>In SSH, the server sends its public key to the client during the </a:t>
-            </a:r>
-            <a:r>
-              <a:rPr lang="en-GB" b="1" dirty="0"/>
-              <a:t>key exchange process</a:t>
-            </a:r>
-            <a:r>
-              <a:rPr lang="en-GB" dirty="0"/>
-              <a:t>, which occurs right after the connection is initiated and before any sensitive data (such as authentication credentials) is transmitted. Here’s how and why this happens:</a:t>
-            </a:r>
-          </a:p>
-          <a:p>
-            <a:pPr>
-              <a:buFont typeface="+mj-lt"/>
-              <a:buAutoNum type="arabicPeriod"/>
-            </a:pPr>
-            <a:r>
-              <a:rPr lang="en-GB" b="1" dirty="0"/>
-              <a:t>Initial Connection and Key Exchange</a:t>
-            </a:r>
-            <a:r>
-              <a:rPr lang="en-GB" dirty="0"/>
-              <a:t>:</a:t>
-            </a:r>
-          </a:p>
-          <a:p>
-            <a:pPr marL="742950" lvl="1" indent="-285750">
-              <a:buFont typeface="+mj-lt"/>
-              <a:buAutoNum type="arabicPeriod"/>
-            </a:pPr>
-            <a:r>
-              <a:rPr lang="en-GB" dirty="0"/>
-              <a:t>When the SSH client connects to the server, they agree on the key exchange algorithm to use, like Diffie-Hellman.</a:t>
-            </a:r>
-          </a:p>
-          <a:p>
-            <a:pPr marL="742950" lvl="1" indent="-285750">
-              <a:buFont typeface="+mj-lt"/>
-              <a:buAutoNum type="arabicPeriod"/>
-            </a:pPr>
-            <a:r>
-              <a:rPr lang="en-GB" dirty="0"/>
-              <a:t>As part of this process, the server sends its </a:t>
-            </a:r>
-            <a:r>
-              <a:rPr lang="en-GB" b="1" dirty="0"/>
-              <a:t>public host key</a:t>
-            </a:r>
-            <a:r>
-              <a:rPr lang="en-GB" dirty="0"/>
-              <a:t> to the client. This key is unique to the server and acts as an identifier to help the client verify that it is connecting to the legitimate server.</a:t>
-            </a:r>
-          </a:p>
-          <a:p>
-            <a:pPr>
-              <a:buFont typeface="+mj-lt"/>
-              <a:buAutoNum type="arabicPeriod"/>
-            </a:pPr>
-            <a:r>
-              <a:rPr lang="en-GB" b="1" dirty="0"/>
-              <a:t>Host Key Verification</a:t>
-            </a:r>
-            <a:r>
-              <a:rPr lang="en-GB" dirty="0"/>
-              <a:t>:</a:t>
-            </a:r>
-          </a:p>
-          <a:p>
-            <a:pPr marL="742950" lvl="1" indent="-285750">
-              <a:buFont typeface="+mj-lt"/>
-              <a:buAutoNum type="arabicPeriod"/>
-            </a:pPr>
-            <a:r>
-              <a:rPr lang="en-GB" dirty="0"/>
-              <a:t>When the client receives the server’s public host key, it checks this key against a known hosts list (usually stored in the client’s ~/.ssh/</a:t>
-            </a:r>
-            <a:r>
-              <a:rPr lang="en-GB" dirty="0" err="1"/>
-              <a:t>known_hosts</a:t>
-            </a:r>
-            <a:r>
-              <a:rPr lang="en-GB" dirty="0"/>
-              <a:t> file).</a:t>
-            </a:r>
-          </a:p>
-          <a:p>
-            <a:pPr marL="742950" lvl="1" indent="-285750">
-              <a:buFont typeface="+mj-lt"/>
-              <a:buAutoNum type="arabicPeriod"/>
-            </a:pPr>
-            <a:r>
-              <a:rPr lang="en-GB" dirty="0"/>
-              <a:t>If the key matches an entry in this file, the client assumes it’s connecting to the legitimate server. If not, the client may issue a warning, and the user can choose to proceed or cancel the connection.</a:t>
-            </a:r>
-          </a:p>
-          <a:p>
-            <a:pPr marL="742950" lvl="1" indent="-285750">
-              <a:buFont typeface="+mj-lt"/>
-              <a:buAutoNum type="arabicPeriod"/>
-            </a:pPr>
-            <a:r>
-              <a:rPr lang="en-GB" dirty="0"/>
-              <a:t>This verification helps protect against </a:t>
-            </a:r>
-            <a:r>
-              <a:rPr lang="en-GB" b="1" dirty="0"/>
-              <a:t>man-in-the-middle attacks</a:t>
-            </a:r>
-            <a:r>
-              <a:rPr lang="en-GB" dirty="0"/>
-              <a:t> by ensuring that the client is not connecting to a malicious server impersonating the legitimate one.</a:t>
-            </a:r>
-          </a:p>
-          <a:p>
-            <a:pPr>
-              <a:buFont typeface="+mj-lt"/>
-              <a:buAutoNum type="arabicPeriod"/>
-            </a:pPr>
-            <a:r>
-              <a:rPr lang="en-GB" b="1" dirty="0"/>
-              <a:t>Symmetric Key Generation</a:t>
-            </a:r>
-            <a:r>
-              <a:rPr lang="en-GB" dirty="0"/>
-              <a:t>:</a:t>
-            </a:r>
-          </a:p>
-          <a:p>
-            <a:pPr marL="742950" lvl="1" indent="-285750">
-              <a:buFont typeface="+mj-lt"/>
-              <a:buAutoNum type="arabicPeriod"/>
-            </a:pPr>
-            <a:r>
-              <a:rPr lang="en-GB" dirty="0"/>
-              <a:t>After the server’s public key is verified, the client and server use the agreed-upon key exchange algorithm to generate a </a:t>
-            </a:r>
-            <a:r>
-              <a:rPr lang="en-GB" b="1" dirty="0"/>
-              <a:t>shared secret</a:t>
-            </a:r>
-            <a:r>
-              <a:rPr lang="en-GB" dirty="0"/>
-              <a:t> based on each other’s public information. This shared secret will be used to create symmetric encryption keys for the session.</a:t>
-            </a:r>
-          </a:p>
-          <a:p>
             <a:endParaRPr lang="en-US" dirty="0"/>
           </a:p>
         </p:txBody>
@@ -1473,7 +1854,7 @@
           <a:p>
             <a:fld id="{F7021451-1387-4CA6-816F-3879F97B5CBC}" type="slidenum">
               <a:rPr lang="en-US"/>
-              <a:t>6</a:t>
+              <a:t>7</a:t>
             </a:fld>
             <a:endParaRPr lang="en-US"/>
           </a:p>
@@ -1557,7 +1938,7 @@
           <a:p>
             <a:fld id="{F7021451-1387-4CA6-816F-3879F97B5CBC}" type="slidenum">
               <a:rPr lang="en-US"/>
-              <a:t>7</a:t>
+              <a:t>8</a:t>
             </a:fld>
             <a:endParaRPr lang="en-US"/>
           </a:p>
@@ -1641,7 +2022,7 @@
           <a:p>
             <a:fld id="{F7021451-1387-4CA6-816F-3879F97B5CBC}" type="slidenum">
               <a:rPr lang="en-US"/>
-              <a:t>8</a:t>
+              <a:t>9</a:t>
             </a:fld>
             <a:endParaRPr lang="en-US"/>
           </a:p>
@@ -1725,7 +2106,7 @@
           <a:p>
             <a:fld id="{F7021451-1387-4CA6-816F-3879F97B5CBC}" type="slidenum">
               <a:rPr lang="en-US"/>
-              <a:t>9</a:t>
+              <a:t>10</a:t>
             </a:fld>
             <a:endParaRPr lang="en-US"/>
           </a:p>
@@ -2058,21 +2439,7 @@
 
 <file path=ppt/slides/slide1.xml><?xml version="1.0" encoding="utf-8"?>
 <p:sld xmlns:a="http://schemas.openxmlformats.org/drawingml/2006/main" xmlns:r="http://schemas.openxmlformats.org/officeDocument/2006/relationships" xmlns:p="http://schemas.openxmlformats.org/presentationml/2006/main">
-  <p:cSld name="Slide 1">
-    <p:bg>
-      <p:bgPr>
-        <a:blipFill dpi="0" rotWithShape="1">
-          <a:blip r:embed="rId3">
-            <a:lum/>
-          </a:blip>
-          <a:srcRect/>
-          <a:stretch>
-            <a:fillRect/>
-          </a:stretch>
-        </a:blipFill>
-        <a:effectLst/>
-      </p:bgPr>
-    </p:bg>
+  <p:cSld>
     <p:spTree>
       <p:nvGrpSpPr>
         <p:cNvPr id="1" name=""/>
@@ -2087,7 +2454,187 @@
           <a:chExt cx="0" cy="0"/>
         </a:xfrm>
       </p:grpSpPr>
+      <p:pic>
+        <p:nvPicPr>
+          <p:cNvPr id="3" name="Picture 2">
+            <a:extLst>
+              <a:ext uri="{FF2B5EF4-FFF2-40B4-BE49-F238E27FC236}">
+                <a16:creationId xmlns:a16="http://schemas.microsoft.com/office/drawing/2014/main" id="{CD687EE9-2CFD-93EE-AE04-378B2EDD673A}"/>
+              </a:ext>
+            </a:extLst>
+          </p:cNvPr>
+          <p:cNvPicPr>
+            <a:picLocks noChangeAspect="1"/>
+          </p:cNvPicPr>
+          <p:nvPr/>
+        </p:nvPicPr>
+        <p:blipFill>
+          <a:blip r:embed="rId2"/>
+          <a:stretch>
+            <a:fillRect/>
+          </a:stretch>
+        </p:blipFill>
+        <p:spPr>
+          <a:xfrm>
+            <a:off x="1245320" y="718990"/>
+            <a:ext cx="2422577" cy="2682984"/>
+          </a:xfrm>
+          <a:prstGeom prst="rect">
+            <a:avLst/>
+          </a:prstGeom>
+        </p:spPr>
+      </p:pic>
+      <p:sp>
+        <p:nvSpPr>
+          <p:cNvPr id="4" name="TextBox 3">
+            <a:extLst>
+              <a:ext uri="{FF2B5EF4-FFF2-40B4-BE49-F238E27FC236}">
+                <a16:creationId xmlns:a16="http://schemas.microsoft.com/office/drawing/2014/main" id="{5283E966-8EF1-0E48-E8E1-28AB830D4C53}"/>
+              </a:ext>
+            </a:extLst>
+          </p:cNvPr>
+          <p:cNvSpPr txBox="1"/>
+          <p:nvPr/>
+        </p:nvSpPr>
+        <p:spPr>
+          <a:xfrm>
+            <a:off x="3709012" y="4255712"/>
+            <a:ext cx="5432612" cy="1569660"/>
+          </a:xfrm>
+          <a:prstGeom prst="rect">
+            <a:avLst/>
+          </a:prstGeom>
+          <a:noFill/>
+        </p:spPr>
+        <p:txBody>
+          <a:bodyPr wrap="square" rtlCol="0">
+            <a:spAutoFit/>
+          </a:bodyPr>
+          <a:lstStyle/>
+          <a:p>
+            <a:r>
+              <a:rPr lang="en-IE" sz="3200" dirty="0"/>
+              <a:t>Connecting and Configuring your RPi using SSH, </a:t>
+            </a:r>
+            <a:r>
+              <a:rPr lang="en-IE" sz="3200" dirty="0" err="1"/>
+              <a:t>mDNS</a:t>
+            </a:r>
+            <a:r>
+              <a:rPr lang="en-IE" sz="3200" dirty="0"/>
+              <a:t> and Network Manager(</a:t>
+            </a:r>
+            <a:r>
+              <a:rPr lang="en-IE" sz="3200" dirty="0" err="1"/>
+              <a:t>nmcli</a:t>
+            </a:r>
+            <a:r>
+              <a:rPr lang="en-IE" sz="3200" dirty="0"/>
+              <a:t>)</a:t>
+            </a:r>
+          </a:p>
+        </p:txBody>
+      </p:sp>
+      <p:pic>
+        <p:nvPicPr>
+          <p:cNvPr id="5" name="Picture 2" descr="mdns-sd · GitHub Topics · GitHub">
+            <a:extLst>
+              <a:ext uri="{FF2B5EF4-FFF2-40B4-BE49-F238E27FC236}">
+                <a16:creationId xmlns:a16="http://schemas.microsoft.com/office/drawing/2014/main" id="{CB6A44C6-830A-5C31-3BFA-04A3EF8F5D77}"/>
+              </a:ext>
+            </a:extLst>
+          </p:cNvPr>
+          <p:cNvPicPr>
+            <a:picLocks noChangeAspect="1" noChangeArrowheads="1"/>
+          </p:cNvPicPr>
+          <p:nvPr/>
+        </p:nvPicPr>
+        <p:blipFill>
+          <a:blip r:embed="rId3">
+            <a:extLst>
+              <a:ext uri="{28A0092B-C50C-407E-A947-70E740481C1C}">
+                <a14:useLocalDpi xmlns:a14="http://schemas.microsoft.com/office/drawing/2010/main" val="0"/>
+              </a:ext>
+            </a:extLst>
+          </a:blip>
+          <a:srcRect/>
+          <a:stretch>
+            <a:fillRect/>
+          </a:stretch>
+        </p:blipFill>
+        <p:spPr bwMode="auto">
+          <a:xfrm>
+            <a:off x="4734803" y="718990"/>
+            <a:ext cx="2894345" cy="2894345"/>
+          </a:xfrm>
+          <a:prstGeom prst="rect">
+            <a:avLst/>
+          </a:prstGeom>
+          <a:noFill/>
+          <a:extLst>
+            <a:ext uri="{909E8E84-426E-40DD-AFC4-6F175D3DCCD1}">
+              <a14:hiddenFill xmlns:a14="http://schemas.microsoft.com/office/drawing/2010/main">
+                <a:solidFill>
+                  <a:srgbClr val="FFFFFF"/>
+                </a:solidFill>
+              </a14:hiddenFill>
+            </a:ext>
+          </a:extLst>
+        </p:spPr>
+      </p:pic>
+      <p:pic>
+        <p:nvPicPr>
+          <p:cNvPr id="2050" name="Picture 2" descr="How to use the nmcli command: Linux Tip">
+            <a:extLst>
+              <a:ext uri="{FF2B5EF4-FFF2-40B4-BE49-F238E27FC236}">
+                <a16:creationId xmlns:a16="http://schemas.microsoft.com/office/drawing/2014/main" id="{20D83E6C-B692-CB78-EAFC-05CE1021AB85}"/>
+              </a:ext>
+            </a:extLst>
+          </p:cNvPr>
+          <p:cNvPicPr>
+            <a:picLocks noChangeAspect="1" noChangeArrowheads="1"/>
+          </p:cNvPicPr>
+          <p:nvPr/>
+        </p:nvPicPr>
+        <p:blipFill rotWithShape="1">
+          <a:blip r:embed="rId4">
+            <a:extLst>
+              <a:ext uri="{28A0092B-C50C-407E-A947-70E740481C1C}">
+                <a14:useLocalDpi xmlns:a14="http://schemas.microsoft.com/office/drawing/2010/main" val="0"/>
+              </a:ext>
+            </a:extLst>
+          </a:blip>
+          <a:srcRect r="19451"/>
+          <a:stretch>
+            <a:fillRect/>
+          </a:stretch>
+        </p:blipFill>
+        <p:spPr bwMode="auto">
+          <a:xfrm>
+            <a:off x="8673913" y="784198"/>
+            <a:ext cx="2661397" cy="2478050"/>
+          </a:xfrm>
+          <a:prstGeom prst="rect">
+            <a:avLst/>
+          </a:prstGeom>
+          <a:noFill/>
+          <a:extLst>
+            <a:ext uri="{909E8E84-426E-40DD-AFC4-6F175D3DCCD1}">
+              <a14:hiddenFill xmlns:a14="http://schemas.microsoft.com/office/drawing/2010/main">
+                <a:solidFill>
+                  <a:srgbClr val="FFFFFF"/>
+                </a:solidFill>
+              </a14:hiddenFill>
+            </a:ext>
+          </a:extLst>
+        </p:spPr>
+      </p:pic>
     </p:spTree>
+    <p:extLst>
+      <p:ext uri="{BB962C8B-B14F-4D97-AF65-F5344CB8AC3E}">
+        <p14:creationId xmlns:p14="http://schemas.microsoft.com/office/powerpoint/2010/main" val="60367883"/>
+      </p:ext>
+    </p:extLst>
   </p:cSld>
   <p:clrMapOvr>
     <a:masterClrMapping/>
@@ -2165,6 +2712,93 @@
           <a:chExt cx="0" cy="0"/>
         </a:xfrm>
       </p:grpSpPr>
+      <p:sp>
+        <p:nvSpPr>
+          <p:cNvPr id="2" name="TextBox 1">
+            <a:extLst>
+              <a:ext uri="{FF2B5EF4-FFF2-40B4-BE49-F238E27FC236}">
+                <a16:creationId xmlns:a16="http://schemas.microsoft.com/office/drawing/2014/main" id="{DA11FADD-5222-13EA-C3B7-0C5ACACA4374}"/>
+              </a:ext>
+            </a:extLst>
+          </p:cNvPr>
+          <p:cNvSpPr txBox="1"/>
+          <p:nvPr/>
+        </p:nvSpPr>
+        <p:spPr>
+          <a:xfrm>
+            <a:off x="954741" y="5096436"/>
+            <a:ext cx="9533965" cy="1200329"/>
+          </a:xfrm>
+          <a:prstGeom prst="rect">
+            <a:avLst/>
+          </a:prstGeom>
+          <a:noFill/>
+        </p:spPr>
+        <p:txBody>
+          <a:bodyPr wrap="square" rtlCol="0">
+            <a:spAutoFit/>
+          </a:bodyPr>
+          <a:lstStyle/>
+          <a:p>
+            <a:pPr marL="285750" indent="-285750">
+              <a:buFont typeface="Arial" panose="020B0604020202020204" pitchFamily="34" charset="0"/>
+              <a:buChar char="•"/>
+            </a:pPr>
+            <a:r>
+              <a:rPr lang="en-IE" sz="2400" dirty="0">
+                <a:latin typeface="+mj-lt"/>
+              </a:rPr>
+              <a:t>You can also use host name instead of IP address: ssh </a:t>
+            </a:r>
+            <a:r>
+              <a:rPr lang="en-IE" sz="2400" dirty="0" err="1">
+                <a:latin typeface="+mj-lt"/>
+                <a:hlinkClick r:id="rId4"/>
+              </a:rPr>
+              <a:t>frank@raspberrypi.local</a:t>
+            </a:r>
+            <a:r>
+              <a:rPr lang="en-IE" sz="2400" dirty="0">
+                <a:latin typeface="+mj-lt"/>
+              </a:rPr>
+              <a:t> or </a:t>
+            </a:r>
+            <a:r>
+              <a:rPr lang="en-IE" sz="2400" dirty="0" err="1">
+                <a:latin typeface="+mj-lt"/>
+              </a:rPr>
+              <a:t>user@someDomainName</a:t>
+            </a:r>
+            <a:endParaRPr lang="en-IE" sz="2400" dirty="0">
+              <a:latin typeface="+mj-lt"/>
+            </a:endParaRPr>
+          </a:p>
+          <a:p>
+            <a:pPr marL="742950" lvl="1" indent="-285750">
+              <a:buFont typeface="Arial" panose="020B0604020202020204" pitchFamily="34" charset="0"/>
+              <a:buChar char="•"/>
+            </a:pPr>
+            <a:r>
+              <a:rPr lang="en-IE" sz="2400" dirty="0">
+                <a:latin typeface="+mj-lt"/>
+              </a:rPr>
+              <a:t>Hostname resolved to IP address using DNS/</a:t>
+            </a:r>
+            <a:r>
+              <a:rPr lang="en-IE" sz="2400" dirty="0" err="1">
+                <a:latin typeface="+mj-lt"/>
+              </a:rPr>
+              <a:t>mDNS</a:t>
+            </a:r>
+            <a:r>
+              <a:rPr lang="en-IE" sz="2400" dirty="0">
+                <a:latin typeface="+mj-lt"/>
+              </a:rPr>
+              <a:t> – more later</a:t>
+            </a:r>
+          </a:p>
+        </p:txBody>
+      </p:sp>
     </p:spTree>
   </p:cSld>
   <p:clrMapOvr>
@@ -2214,7 +2848,7 @@
 
 <file path=ppt/slides/slide13.xml><?xml version="1.0" encoding="utf-8"?>
 <p:sld xmlns:a="http://schemas.openxmlformats.org/drawingml/2006/main" xmlns:r="http://schemas.openxmlformats.org/officeDocument/2006/relationships" xmlns:p="http://schemas.openxmlformats.org/presentationml/2006/main">
-  <p:cSld name="Slide 13">
+  <p:cSld name="Slide 15">
     <p:bg>
       <p:bgPr>
         <a:blipFill dpi="0" rotWithShape="1">
@@ -2253,7 +2887,1599 @@
 
 <file path=ppt/slides/slide14.xml><?xml version="1.0" encoding="utf-8"?>
 <p:sld xmlns:a="http://schemas.openxmlformats.org/drawingml/2006/main" xmlns:r="http://schemas.openxmlformats.org/officeDocument/2006/relationships" xmlns:p="http://schemas.openxmlformats.org/presentationml/2006/main">
-  <p:cSld name="Slide 14">
+  <p:cSld>
+    <p:spTree>
+      <p:nvGrpSpPr>
+        <p:cNvPr id="1" name=""/>
+        <p:cNvGrpSpPr/>
+        <p:nvPr/>
+      </p:nvGrpSpPr>
+      <p:grpSpPr>
+        <a:xfrm>
+          <a:off x="0" y="0"/>
+          <a:ext cx="0" cy="0"/>
+          <a:chOff x="0" y="0"/>
+          <a:chExt cx="0" cy="0"/>
+        </a:xfrm>
+      </p:grpSpPr>
+      <p:sp>
+        <p:nvSpPr>
+          <p:cNvPr id="2" name="Title 1">
+            <a:extLst>
+              <a:ext uri="{FF2B5EF4-FFF2-40B4-BE49-F238E27FC236}">
+                <a16:creationId xmlns:a16="http://schemas.microsoft.com/office/drawing/2014/main" id="{9AF2A59E-06A1-06FC-2CC5-B9AB17163976}"/>
+              </a:ext>
+            </a:extLst>
+          </p:cNvPr>
+          <p:cNvSpPr txBox="1">
+            <a:spLocks/>
+          </p:cNvSpPr>
+          <p:nvPr/>
+        </p:nvSpPr>
+        <p:spPr>
+          <a:xfrm>
+            <a:off x="457200" y="274638"/>
+            <a:ext cx="8229600" cy="1143000"/>
+          </a:xfrm>
+          <a:prstGeom prst="rect">
+            <a:avLst/>
+          </a:prstGeom>
+        </p:spPr>
+        <p:txBody>
+          <a:bodyPr/>
+          <a:lstStyle>
+            <a:lvl1pPr algn="ctr" defTabSz="914400" rtl="0" eaLnBrk="1" latinLnBrk="0" hangingPunct="1">
+              <a:spcBef>
+                <a:spcPct val="0"/>
+              </a:spcBef>
+              <a:buNone/>
+              <a:defRPr sz="4400" kern="1200">
+                <a:solidFill>
+                  <a:schemeClr val="tx1"/>
+                </a:solidFill>
+                <a:latin typeface="+mj-lt"/>
+                <a:ea typeface="+mj-ea"/>
+                <a:cs typeface="+mj-cs"/>
+              </a:defRPr>
+            </a:lvl1pPr>
+          </a:lstStyle>
+          <a:p>
+            <a:r>
+              <a:rPr lang="en-IE"/>
+              <a:t>From DNS to mDNS</a:t>
+            </a:r>
+            <a:endParaRPr lang="en-IE" dirty="0"/>
+          </a:p>
+        </p:txBody>
+      </p:sp>
+      <p:sp>
+        <p:nvSpPr>
+          <p:cNvPr id="3" name="Content Placeholder 2">
+            <a:extLst>
+              <a:ext uri="{FF2B5EF4-FFF2-40B4-BE49-F238E27FC236}">
+                <a16:creationId xmlns:a16="http://schemas.microsoft.com/office/drawing/2014/main" id="{0BFC14CB-982B-9C73-D99E-B47C295BB01C}"/>
+              </a:ext>
+            </a:extLst>
+          </p:cNvPr>
+          <p:cNvSpPr txBox="1">
+            <a:spLocks/>
+          </p:cNvSpPr>
+          <p:nvPr/>
+        </p:nvSpPr>
+        <p:spPr>
+          <a:xfrm>
+            <a:off x="282388" y="1166018"/>
+            <a:ext cx="8229600" cy="4525963"/>
+          </a:xfrm>
+          <a:prstGeom prst="rect">
+            <a:avLst/>
+          </a:prstGeom>
+        </p:spPr>
+        <p:txBody>
+          <a:bodyPr wrap="square"/>
+          <a:lstStyle>
+            <a:lvl1pPr marL="342900" indent="-342900" algn="l" defTabSz="914400" rtl="0" eaLnBrk="1" latinLnBrk="0" hangingPunct="1">
+              <a:spcBef>
+                <a:spcPct val="20000"/>
+              </a:spcBef>
+              <a:buFont typeface="Arial" pitchFamily="34" charset="0"/>
+              <a:buChar char="•"/>
+              <a:defRPr sz="3200" kern="1200">
+                <a:solidFill>
+                  <a:schemeClr val="tx1"/>
+                </a:solidFill>
+                <a:latin typeface="+mn-lt"/>
+                <a:ea typeface="+mn-ea"/>
+                <a:cs typeface="+mn-cs"/>
+              </a:defRPr>
+            </a:lvl1pPr>
+            <a:lvl2pPr marL="742950" indent="-285750" algn="l" defTabSz="914400" rtl="0" eaLnBrk="1" latinLnBrk="0" hangingPunct="1">
+              <a:spcBef>
+                <a:spcPct val="20000"/>
+              </a:spcBef>
+              <a:buFont typeface="Arial" pitchFamily="34" charset="0"/>
+              <a:buChar char="–"/>
+              <a:defRPr sz="2800" kern="1200">
+                <a:solidFill>
+                  <a:schemeClr val="tx1"/>
+                </a:solidFill>
+                <a:latin typeface="+mn-lt"/>
+                <a:ea typeface="+mn-ea"/>
+                <a:cs typeface="+mn-cs"/>
+              </a:defRPr>
+            </a:lvl2pPr>
+            <a:lvl3pPr marL="1143000" indent="-228600" algn="l" defTabSz="914400" rtl="0" eaLnBrk="1" latinLnBrk="0" hangingPunct="1">
+              <a:spcBef>
+                <a:spcPct val="20000"/>
+              </a:spcBef>
+              <a:buFont typeface="Arial" pitchFamily="34" charset="0"/>
+              <a:buChar char="•"/>
+              <a:defRPr sz="2400" kern="1200">
+                <a:solidFill>
+                  <a:schemeClr val="tx1"/>
+                </a:solidFill>
+                <a:latin typeface="+mn-lt"/>
+                <a:ea typeface="+mn-ea"/>
+                <a:cs typeface="+mn-cs"/>
+              </a:defRPr>
+            </a:lvl3pPr>
+            <a:lvl4pPr marL="1600200" indent="-228600" algn="l" defTabSz="914400" rtl="0" eaLnBrk="1" latinLnBrk="0" hangingPunct="1">
+              <a:spcBef>
+                <a:spcPct val="20000"/>
+              </a:spcBef>
+              <a:buFont typeface="Arial" pitchFamily="34" charset="0"/>
+              <a:buChar char="–"/>
+              <a:defRPr sz="2000" kern="1200">
+                <a:solidFill>
+                  <a:schemeClr val="tx1"/>
+                </a:solidFill>
+                <a:latin typeface="+mn-lt"/>
+                <a:ea typeface="+mn-ea"/>
+                <a:cs typeface="+mn-cs"/>
+              </a:defRPr>
+            </a:lvl4pPr>
+            <a:lvl5pPr marL="2057400" indent="-228600" algn="l" defTabSz="914400" rtl="0" eaLnBrk="1" latinLnBrk="0" hangingPunct="1">
+              <a:spcBef>
+                <a:spcPct val="20000"/>
+              </a:spcBef>
+              <a:buFont typeface="Arial" pitchFamily="34" charset="0"/>
+              <a:buChar char="»"/>
+              <a:defRPr sz="2000" kern="1200">
+                <a:solidFill>
+                  <a:schemeClr val="tx1"/>
+                </a:solidFill>
+                <a:latin typeface="+mn-lt"/>
+                <a:ea typeface="+mn-ea"/>
+                <a:cs typeface="+mn-cs"/>
+              </a:defRPr>
+            </a:lvl5pPr>
+            <a:lvl6pPr marL="2514600" indent="-228600" algn="l" defTabSz="914400" rtl="0" eaLnBrk="1" latinLnBrk="0" hangingPunct="1">
+              <a:spcBef>
+                <a:spcPct val="20000"/>
+              </a:spcBef>
+              <a:buFont typeface="Arial" pitchFamily="34" charset="0"/>
+              <a:buChar char="•"/>
+              <a:defRPr sz="2000" kern="1200">
+                <a:solidFill>
+                  <a:schemeClr val="tx1"/>
+                </a:solidFill>
+                <a:latin typeface="+mn-lt"/>
+                <a:ea typeface="+mn-ea"/>
+                <a:cs typeface="+mn-cs"/>
+              </a:defRPr>
+            </a:lvl6pPr>
+            <a:lvl7pPr marL="2971800" indent="-228600" algn="l" defTabSz="914400" rtl="0" eaLnBrk="1" latinLnBrk="0" hangingPunct="1">
+              <a:spcBef>
+                <a:spcPct val="20000"/>
+              </a:spcBef>
+              <a:buFont typeface="Arial" pitchFamily="34" charset="0"/>
+              <a:buChar char="•"/>
+              <a:defRPr sz="2000" kern="1200">
+                <a:solidFill>
+                  <a:schemeClr val="tx1"/>
+                </a:solidFill>
+                <a:latin typeface="+mn-lt"/>
+                <a:ea typeface="+mn-ea"/>
+                <a:cs typeface="+mn-cs"/>
+              </a:defRPr>
+            </a:lvl7pPr>
+            <a:lvl8pPr marL="3429000" indent="-228600" algn="l" defTabSz="914400" rtl="0" eaLnBrk="1" latinLnBrk="0" hangingPunct="1">
+              <a:spcBef>
+                <a:spcPct val="20000"/>
+              </a:spcBef>
+              <a:buFont typeface="Arial" pitchFamily="34" charset="0"/>
+              <a:buChar char="•"/>
+              <a:defRPr sz="2000" kern="1200">
+                <a:solidFill>
+                  <a:schemeClr val="tx1"/>
+                </a:solidFill>
+                <a:latin typeface="+mn-lt"/>
+                <a:ea typeface="+mn-ea"/>
+                <a:cs typeface="+mn-cs"/>
+              </a:defRPr>
+            </a:lvl8pPr>
+            <a:lvl9pPr marL="3886200" indent="-228600" algn="l" defTabSz="914400" rtl="0" eaLnBrk="1" latinLnBrk="0" hangingPunct="1">
+              <a:spcBef>
+                <a:spcPct val="20000"/>
+              </a:spcBef>
+              <a:buFont typeface="Arial" pitchFamily="34" charset="0"/>
+              <a:buChar char="•"/>
+              <a:defRPr sz="2000" kern="1200">
+                <a:solidFill>
+                  <a:schemeClr val="tx1"/>
+                </a:solidFill>
+                <a:latin typeface="+mn-lt"/>
+                <a:ea typeface="+mn-ea"/>
+                <a:cs typeface="+mn-cs"/>
+              </a:defRPr>
+            </a:lvl9pPr>
+          </a:lstStyle>
+          <a:p>
+            <a:endParaRPr lang="en-GB" dirty="0"/>
+          </a:p>
+          <a:p>
+            <a:r>
+              <a:rPr lang="en-GB" dirty="0"/>
+              <a:t>DNS translates domain names to IP addresses (e.g., example.com → 93.184.216.34)</a:t>
+            </a:r>
+          </a:p>
+          <a:p>
+            <a:pPr lvl="1"/>
+            <a:r>
+              <a:rPr lang="en-GB" dirty="0"/>
+              <a:t>Covered in previous weeks</a:t>
+            </a:r>
+          </a:p>
+          <a:p>
+            <a:r>
+              <a:rPr lang="en-GB" dirty="0"/>
+              <a:t>Requires a DNS server and usually works across the Internet or large networks</a:t>
+            </a:r>
+          </a:p>
+          <a:p>
+            <a:r>
+              <a:rPr lang="en-GB" dirty="0"/>
+              <a:t>But what about local networks with no DNS server?</a:t>
+            </a:r>
+          </a:p>
+        </p:txBody>
+      </p:sp>
+      <p:pic>
+        <p:nvPicPr>
+          <p:cNvPr id="1026" name="Picture 2" descr="mdns-sd · GitHub Topics · GitHub">
+            <a:extLst>
+              <a:ext uri="{FF2B5EF4-FFF2-40B4-BE49-F238E27FC236}">
+                <a16:creationId xmlns:a16="http://schemas.microsoft.com/office/drawing/2014/main" id="{C9347C13-B141-5408-1497-2EB0ADF872F1}"/>
+              </a:ext>
+            </a:extLst>
+          </p:cNvPr>
+          <p:cNvPicPr>
+            <a:picLocks noChangeAspect="1" noChangeArrowheads="1"/>
+          </p:cNvPicPr>
+          <p:nvPr/>
+        </p:nvPicPr>
+        <p:blipFill>
+          <a:blip r:embed="rId2">
+            <a:extLst>
+              <a:ext uri="{28A0092B-C50C-407E-A947-70E740481C1C}">
+                <a14:useLocalDpi xmlns:a14="http://schemas.microsoft.com/office/drawing/2010/main" val="0"/>
+              </a:ext>
+            </a:extLst>
+          </a:blip>
+          <a:srcRect/>
+          <a:stretch>
+            <a:fillRect/>
+          </a:stretch>
+        </p:blipFill>
+        <p:spPr bwMode="auto">
+          <a:xfrm>
+            <a:off x="7315200" y="1166018"/>
+            <a:ext cx="4876800" cy="4876800"/>
+          </a:xfrm>
+          <a:prstGeom prst="rect">
+            <a:avLst/>
+          </a:prstGeom>
+          <a:noFill/>
+          <a:extLst>
+            <a:ext uri="{909E8E84-426E-40DD-AFC4-6F175D3DCCD1}">
+              <a14:hiddenFill xmlns:a14="http://schemas.microsoft.com/office/drawing/2010/main">
+                <a:solidFill>
+                  <a:srgbClr val="FFFFFF"/>
+                </a:solidFill>
+              </a14:hiddenFill>
+            </a:ext>
+          </a:extLst>
+        </p:spPr>
+      </p:pic>
+    </p:spTree>
+    <p:extLst>
+      <p:ext uri="{BB962C8B-B14F-4D97-AF65-F5344CB8AC3E}">
+        <p14:creationId xmlns:p14="http://schemas.microsoft.com/office/powerpoint/2010/main" val="1928349678"/>
+      </p:ext>
+    </p:extLst>
+  </p:cSld>
+  <p:clrMapOvr>
+    <a:masterClrMapping/>
+  </p:clrMapOvr>
+</p:sld>
+</file>
+
+<file path=ppt/slides/slide15.xml><?xml version="1.0" encoding="utf-8"?>
+<p:sld xmlns:a="http://schemas.openxmlformats.org/drawingml/2006/main" xmlns:r="http://schemas.openxmlformats.org/officeDocument/2006/relationships" xmlns:p="http://schemas.openxmlformats.org/presentationml/2006/main">
+  <p:cSld>
+    <p:spTree>
+      <p:nvGrpSpPr>
+        <p:cNvPr id="1" name=""/>
+        <p:cNvGrpSpPr/>
+        <p:nvPr/>
+      </p:nvGrpSpPr>
+      <p:grpSpPr>
+        <a:xfrm>
+          <a:off x="0" y="0"/>
+          <a:ext cx="0" cy="0"/>
+          <a:chOff x="0" y="0"/>
+          <a:chExt cx="0" cy="0"/>
+        </a:xfrm>
+      </p:grpSpPr>
+      <p:sp>
+        <p:nvSpPr>
+          <p:cNvPr id="2" name="Title 1">
+            <a:extLst>
+              <a:ext uri="{FF2B5EF4-FFF2-40B4-BE49-F238E27FC236}">
+                <a16:creationId xmlns:a16="http://schemas.microsoft.com/office/drawing/2014/main" id="{D970E6E1-5E46-0BF8-13DA-3E235BE199F9}"/>
+              </a:ext>
+            </a:extLst>
+          </p:cNvPr>
+          <p:cNvSpPr txBox="1">
+            <a:spLocks/>
+          </p:cNvSpPr>
+          <p:nvPr/>
+        </p:nvSpPr>
+        <p:spPr>
+          <a:xfrm>
+            <a:off x="1981200" y="274638"/>
+            <a:ext cx="8229600" cy="1143000"/>
+          </a:xfrm>
+          <a:prstGeom prst="rect">
+            <a:avLst/>
+          </a:prstGeom>
+        </p:spPr>
+        <p:txBody>
+          <a:bodyPr/>
+          <a:lstStyle>
+            <a:lvl1pPr algn="ctr" defTabSz="914400" rtl="0" eaLnBrk="1" latinLnBrk="0" hangingPunct="1">
+              <a:spcBef>
+                <a:spcPct val="0"/>
+              </a:spcBef>
+              <a:buNone/>
+              <a:defRPr sz="4400" kern="1200">
+                <a:solidFill>
+                  <a:schemeClr val="tx1"/>
+                </a:solidFill>
+                <a:latin typeface="+mj-lt"/>
+                <a:ea typeface="+mj-ea"/>
+                <a:cs typeface="+mj-cs"/>
+              </a:defRPr>
+            </a:lvl1pPr>
+          </a:lstStyle>
+          <a:p>
+            <a:r>
+              <a:rPr lang="en-IE"/>
+              <a:t>Multicast DNS (mDNS) Overview</a:t>
+            </a:r>
+            <a:endParaRPr lang="en-IE" dirty="0"/>
+          </a:p>
+        </p:txBody>
+      </p:sp>
+      <p:sp>
+        <p:nvSpPr>
+          <p:cNvPr id="3" name="Content Placeholder 2">
+            <a:extLst>
+              <a:ext uri="{FF2B5EF4-FFF2-40B4-BE49-F238E27FC236}">
+                <a16:creationId xmlns:a16="http://schemas.microsoft.com/office/drawing/2014/main" id="{16BEC8FE-A0CD-F7A7-B764-DA417D6AEE97}"/>
+              </a:ext>
+            </a:extLst>
+          </p:cNvPr>
+          <p:cNvSpPr txBox="1">
+            <a:spLocks/>
+          </p:cNvSpPr>
+          <p:nvPr/>
+        </p:nvSpPr>
+        <p:spPr>
+          <a:xfrm>
+            <a:off x="457200" y="1600200"/>
+            <a:ext cx="8229600" cy="4525963"/>
+          </a:xfrm>
+          <a:prstGeom prst="rect">
+            <a:avLst/>
+          </a:prstGeom>
+        </p:spPr>
+        <p:txBody>
+          <a:bodyPr wrap="square"/>
+          <a:lstStyle>
+            <a:lvl1pPr marL="342900" indent="-342900" algn="l" defTabSz="914400" rtl="0" eaLnBrk="1" latinLnBrk="0" hangingPunct="1">
+              <a:spcBef>
+                <a:spcPct val="20000"/>
+              </a:spcBef>
+              <a:buFont typeface="Arial" pitchFamily="34" charset="0"/>
+              <a:buChar char="•"/>
+              <a:defRPr sz="3200" kern="1200">
+                <a:solidFill>
+                  <a:schemeClr val="tx1"/>
+                </a:solidFill>
+                <a:latin typeface="+mn-lt"/>
+                <a:ea typeface="+mn-ea"/>
+                <a:cs typeface="+mn-cs"/>
+              </a:defRPr>
+            </a:lvl1pPr>
+            <a:lvl2pPr marL="742950" indent="-285750" algn="l" defTabSz="914400" rtl="0" eaLnBrk="1" latinLnBrk="0" hangingPunct="1">
+              <a:spcBef>
+                <a:spcPct val="20000"/>
+              </a:spcBef>
+              <a:buFont typeface="Arial" pitchFamily="34" charset="0"/>
+              <a:buChar char="–"/>
+              <a:defRPr sz="2800" kern="1200">
+                <a:solidFill>
+                  <a:schemeClr val="tx1"/>
+                </a:solidFill>
+                <a:latin typeface="+mn-lt"/>
+                <a:ea typeface="+mn-ea"/>
+                <a:cs typeface="+mn-cs"/>
+              </a:defRPr>
+            </a:lvl2pPr>
+            <a:lvl3pPr marL="1143000" indent="-228600" algn="l" defTabSz="914400" rtl="0" eaLnBrk="1" latinLnBrk="0" hangingPunct="1">
+              <a:spcBef>
+                <a:spcPct val="20000"/>
+              </a:spcBef>
+              <a:buFont typeface="Arial" pitchFamily="34" charset="0"/>
+              <a:buChar char="•"/>
+              <a:defRPr sz="2400" kern="1200">
+                <a:solidFill>
+                  <a:schemeClr val="tx1"/>
+                </a:solidFill>
+                <a:latin typeface="+mn-lt"/>
+                <a:ea typeface="+mn-ea"/>
+                <a:cs typeface="+mn-cs"/>
+              </a:defRPr>
+            </a:lvl3pPr>
+            <a:lvl4pPr marL="1600200" indent="-228600" algn="l" defTabSz="914400" rtl="0" eaLnBrk="1" latinLnBrk="0" hangingPunct="1">
+              <a:spcBef>
+                <a:spcPct val="20000"/>
+              </a:spcBef>
+              <a:buFont typeface="Arial" pitchFamily="34" charset="0"/>
+              <a:buChar char="–"/>
+              <a:defRPr sz="2000" kern="1200">
+                <a:solidFill>
+                  <a:schemeClr val="tx1"/>
+                </a:solidFill>
+                <a:latin typeface="+mn-lt"/>
+                <a:ea typeface="+mn-ea"/>
+                <a:cs typeface="+mn-cs"/>
+              </a:defRPr>
+            </a:lvl4pPr>
+            <a:lvl5pPr marL="2057400" indent="-228600" algn="l" defTabSz="914400" rtl="0" eaLnBrk="1" latinLnBrk="0" hangingPunct="1">
+              <a:spcBef>
+                <a:spcPct val="20000"/>
+              </a:spcBef>
+              <a:buFont typeface="Arial" pitchFamily="34" charset="0"/>
+              <a:buChar char="»"/>
+              <a:defRPr sz="2000" kern="1200">
+                <a:solidFill>
+                  <a:schemeClr val="tx1"/>
+                </a:solidFill>
+                <a:latin typeface="+mn-lt"/>
+                <a:ea typeface="+mn-ea"/>
+                <a:cs typeface="+mn-cs"/>
+              </a:defRPr>
+            </a:lvl5pPr>
+            <a:lvl6pPr marL="2514600" indent="-228600" algn="l" defTabSz="914400" rtl="0" eaLnBrk="1" latinLnBrk="0" hangingPunct="1">
+              <a:spcBef>
+                <a:spcPct val="20000"/>
+              </a:spcBef>
+              <a:buFont typeface="Arial" pitchFamily="34" charset="0"/>
+              <a:buChar char="•"/>
+              <a:defRPr sz="2000" kern="1200">
+                <a:solidFill>
+                  <a:schemeClr val="tx1"/>
+                </a:solidFill>
+                <a:latin typeface="+mn-lt"/>
+                <a:ea typeface="+mn-ea"/>
+                <a:cs typeface="+mn-cs"/>
+              </a:defRPr>
+            </a:lvl6pPr>
+            <a:lvl7pPr marL="2971800" indent="-228600" algn="l" defTabSz="914400" rtl="0" eaLnBrk="1" latinLnBrk="0" hangingPunct="1">
+              <a:spcBef>
+                <a:spcPct val="20000"/>
+              </a:spcBef>
+              <a:buFont typeface="Arial" pitchFamily="34" charset="0"/>
+              <a:buChar char="•"/>
+              <a:defRPr sz="2000" kern="1200">
+                <a:solidFill>
+                  <a:schemeClr val="tx1"/>
+                </a:solidFill>
+                <a:latin typeface="+mn-lt"/>
+                <a:ea typeface="+mn-ea"/>
+                <a:cs typeface="+mn-cs"/>
+              </a:defRPr>
+            </a:lvl7pPr>
+            <a:lvl8pPr marL="3429000" indent="-228600" algn="l" defTabSz="914400" rtl="0" eaLnBrk="1" latinLnBrk="0" hangingPunct="1">
+              <a:spcBef>
+                <a:spcPct val="20000"/>
+              </a:spcBef>
+              <a:buFont typeface="Arial" pitchFamily="34" charset="0"/>
+              <a:buChar char="•"/>
+              <a:defRPr sz="2000" kern="1200">
+                <a:solidFill>
+                  <a:schemeClr val="tx1"/>
+                </a:solidFill>
+                <a:latin typeface="+mn-lt"/>
+                <a:ea typeface="+mn-ea"/>
+                <a:cs typeface="+mn-cs"/>
+              </a:defRPr>
+            </a:lvl8pPr>
+            <a:lvl9pPr marL="3886200" indent="-228600" algn="l" defTabSz="914400" rtl="0" eaLnBrk="1" latinLnBrk="0" hangingPunct="1">
+              <a:spcBef>
+                <a:spcPct val="20000"/>
+              </a:spcBef>
+              <a:buFont typeface="Arial" pitchFamily="34" charset="0"/>
+              <a:buChar char="•"/>
+              <a:defRPr sz="2000" kern="1200">
+                <a:solidFill>
+                  <a:schemeClr val="tx1"/>
+                </a:solidFill>
+                <a:latin typeface="+mn-lt"/>
+                <a:ea typeface="+mn-ea"/>
+                <a:cs typeface="+mn-cs"/>
+              </a:defRPr>
+            </a:lvl9pPr>
+          </a:lstStyle>
+          <a:p>
+            <a:endParaRPr lang="en-GB" dirty="0"/>
+          </a:p>
+          <a:p>
+            <a:r>
+              <a:rPr lang="en-GB" dirty="0" err="1"/>
+              <a:t>mDNS</a:t>
+            </a:r>
+            <a:r>
+              <a:rPr lang="en-GB" dirty="0"/>
+              <a:t> = “Multicast DNS”</a:t>
+            </a:r>
+          </a:p>
+          <a:p>
+            <a:r>
+              <a:rPr lang="en-GB" dirty="0"/>
+              <a:t>Works on local networks (LANs) without a DNS server</a:t>
+            </a:r>
+          </a:p>
+          <a:p>
+            <a:r>
+              <a:rPr lang="en-GB" dirty="0"/>
+              <a:t>Devices broadcast queries to find others using a special multicast address</a:t>
+            </a:r>
+          </a:p>
+          <a:p>
+            <a:r>
+              <a:rPr lang="en-GB" dirty="0"/>
+              <a:t>Defined in </a:t>
+            </a:r>
+            <a:r>
+              <a:rPr lang="en-GB" b="1" dirty="0"/>
+              <a:t>RFC 6762</a:t>
+            </a:r>
+          </a:p>
+          <a:p>
+            <a:pPr lvl="1"/>
+            <a:r>
+              <a:rPr lang="en-GB" b="1" dirty="0"/>
+              <a:t>Request for Comments used to </a:t>
+            </a:r>
+            <a:r>
+              <a:rPr lang="en-GB" dirty="0"/>
+              <a:t>describe, propose, or standardise aspects of the internet and computer networking.</a:t>
+            </a:r>
+          </a:p>
+        </p:txBody>
+      </p:sp>
+    </p:spTree>
+    <p:extLst>
+      <p:ext uri="{BB962C8B-B14F-4D97-AF65-F5344CB8AC3E}">
+        <p14:creationId xmlns:p14="http://schemas.microsoft.com/office/powerpoint/2010/main" val="535196042"/>
+      </p:ext>
+    </p:extLst>
+  </p:cSld>
+  <p:clrMapOvr>
+    <a:masterClrMapping/>
+  </p:clrMapOvr>
+</p:sld>
+</file>
+
+<file path=ppt/slides/slide16.xml><?xml version="1.0" encoding="utf-8"?>
+<p:sld xmlns:a="http://schemas.openxmlformats.org/drawingml/2006/main" xmlns:r="http://schemas.openxmlformats.org/officeDocument/2006/relationships" xmlns:p="http://schemas.openxmlformats.org/presentationml/2006/main">
+  <p:cSld>
+    <p:spTree>
+      <p:nvGrpSpPr>
+        <p:cNvPr id="1" name=""/>
+        <p:cNvGrpSpPr/>
+        <p:nvPr/>
+      </p:nvGrpSpPr>
+      <p:grpSpPr>
+        <a:xfrm>
+          <a:off x="0" y="0"/>
+          <a:ext cx="0" cy="0"/>
+          <a:chOff x="0" y="0"/>
+          <a:chExt cx="0" cy="0"/>
+        </a:xfrm>
+      </p:grpSpPr>
+      <p:sp>
+        <p:nvSpPr>
+          <p:cNvPr id="2" name="Title 1">
+            <a:extLst>
+              <a:ext uri="{FF2B5EF4-FFF2-40B4-BE49-F238E27FC236}">
+                <a16:creationId xmlns:a16="http://schemas.microsoft.com/office/drawing/2014/main" id="{C4902FE0-A597-D78E-ED92-FEF444B315A7}"/>
+              </a:ext>
+            </a:extLst>
+          </p:cNvPr>
+          <p:cNvSpPr txBox="1">
+            <a:spLocks/>
+          </p:cNvSpPr>
+          <p:nvPr/>
+        </p:nvSpPr>
+        <p:spPr>
+          <a:xfrm>
+            <a:off x="1680883" y="274638"/>
+            <a:ext cx="8229600" cy="1143000"/>
+          </a:xfrm>
+          <a:prstGeom prst="rect">
+            <a:avLst/>
+          </a:prstGeom>
+        </p:spPr>
+        <p:txBody>
+          <a:bodyPr/>
+          <a:lstStyle>
+            <a:lvl1pPr algn="ctr" defTabSz="914400" rtl="0" eaLnBrk="1" latinLnBrk="0" hangingPunct="1">
+              <a:spcBef>
+                <a:spcPct val="0"/>
+              </a:spcBef>
+              <a:buNone/>
+              <a:defRPr sz="4400" kern="1200">
+                <a:solidFill>
+                  <a:schemeClr val="tx1"/>
+                </a:solidFill>
+                <a:latin typeface="+mj-lt"/>
+                <a:ea typeface="+mj-ea"/>
+                <a:cs typeface="+mj-cs"/>
+              </a:defRPr>
+            </a:lvl1pPr>
+          </a:lstStyle>
+          <a:p>
+            <a:r>
+              <a:rPr lang="en-IE"/>
+              <a:t>How mDNS Works</a:t>
+            </a:r>
+            <a:endParaRPr lang="en-IE" dirty="0"/>
+          </a:p>
+        </p:txBody>
+      </p:sp>
+      <p:sp>
+        <p:nvSpPr>
+          <p:cNvPr id="3" name="Content Placeholder 2">
+            <a:extLst>
+              <a:ext uri="{FF2B5EF4-FFF2-40B4-BE49-F238E27FC236}">
+                <a16:creationId xmlns:a16="http://schemas.microsoft.com/office/drawing/2014/main" id="{34B18F3E-2224-300C-27D0-623F3D7A42B5}"/>
+              </a:ext>
+            </a:extLst>
+          </p:cNvPr>
+          <p:cNvSpPr txBox="1">
+            <a:spLocks/>
+          </p:cNvSpPr>
+          <p:nvPr/>
+        </p:nvSpPr>
+        <p:spPr>
+          <a:xfrm>
+            <a:off x="457200" y="1166018"/>
+            <a:ext cx="8606118" cy="4525963"/>
+          </a:xfrm>
+          <a:prstGeom prst="rect">
+            <a:avLst/>
+          </a:prstGeom>
+        </p:spPr>
+        <p:txBody>
+          <a:bodyPr wrap="square"/>
+          <a:lstStyle>
+            <a:lvl1pPr marL="342900" indent="-342900" algn="l" defTabSz="914400" rtl="0" eaLnBrk="1" latinLnBrk="0" hangingPunct="1">
+              <a:spcBef>
+                <a:spcPct val="20000"/>
+              </a:spcBef>
+              <a:buFont typeface="Arial" pitchFamily="34" charset="0"/>
+              <a:buChar char="•"/>
+              <a:defRPr sz="3200" kern="1200">
+                <a:solidFill>
+                  <a:schemeClr val="tx1"/>
+                </a:solidFill>
+                <a:latin typeface="+mn-lt"/>
+                <a:ea typeface="+mn-ea"/>
+                <a:cs typeface="+mn-cs"/>
+              </a:defRPr>
+            </a:lvl1pPr>
+            <a:lvl2pPr marL="742950" indent="-285750" algn="l" defTabSz="914400" rtl="0" eaLnBrk="1" latinLnBrk="0" hangingPunct="1">
+              <a:spcBef>
+                <a:spcPct val="20000"/>
+              </a:spcBef>
+              <a:buFont typeface="Arial" pitchFamily="34" charset="0"/>
+              <a:buChar char="–"/>
+              <a:defRPr sz="2800" kern="1200">
+                <a:solidFill>
+                  <a:schemeClr val="tx1"/>
+                </a:solidFill>
+                <a:latin typeface="+mn-lt"/>
+                <a:ea typeface="+mn-ea"/>
+                <a:cs typeface="+mn-cs"/>
+              </a:defRPr>
+            </a:lvl2pPr>
+            <a:lvl3pPr marL="1143000" indent="-228600" algn="l" defTabSz="914400" rtl="0" eaLnBrk="1" latinLnBrk="0" hangingPunct="1">
+              <a:spcBef>
+                <a:spcPct val="20000"/>
+              </a:spcBef>
+              <a:buFont typeface="Arial" pitchFamily="34" charset="0"/>
+              <a:buChar char="•"/>
+              <a:defRPr sz="2400" kern="1200">
+                <a:solidFill>
+                  <a:schemeClr val="tx1"/>
+                </a:solidFill>
+                <a:latin typeface="+mn-lt"/>
+                <a:ea typeface="+mn-ea"/>
+                <a:cs typeface="+mn-cs"/>
+              </a:defRPr>
+            </a:lvl3pPr>
+            <a:lvl4pPr marL="1600200" indent="-228600" algn="l" defTabSz="914400" rtl="0" eaLnBrk="1" latinLnBrk="0" hangingPunct="1">
+              <a:spcBef>
+                <a:spcPct val="20000"/>
+              </a:spcBef>
+              <a:buFont typeface="Arial" pitchFamily="34" charset="0"/>
+              <a:buChar char="–"/>
+              <a:defRPr sz="2000" kern="1200">
+                <a:solidFill>
+                  <a:schemeClr val="tx1"/>
+                </a:solidFill>
+                <a:latin typeface="+mn-lt"/>
+                <a:ea typeface="+mn-ea"/>
+                <a:cs typeface="+mn-cs"/>
+              </a:defRPr>
+            </a:lvl4pPr>
+            <a:lvl5pPr marL="2057400" indent="-228600" algn="l" defTabSz="914400" rtl="0" eaLnBrk="1" latinLnBrk="0" hangingPunct="1">
+              <a:spcBef>
+                <a:spcPct val="20000"/>
+              </a:spcBef>
+              <a:buFont typeface="Arial" pitchFamily="34" charset="0"/>
+              <a:buChar char="»"/>
+              <a:defRPr sz="2000" kern="1200">
+                <a:solidFill>
+                  <a:schemeClr val="tx1"/>
+                </a:solidFill>
+                <a:latin typeface="+mn-lt"/>
+                <a:ea typeface="+mn-ea"/>
+                <a:cs typeface="+mn-cs"/>
+              </a:defRPr>
+            </a:lvl5pPr>
+            <a:lvl6pPr marL="2514600" indent="-228600" algn="l" defTabSz="914400" rtl="0" eaLnBrk="1" latinLnBrk="0" hangingPunct="1">
+              <a:spcBef>
+                <a:spcPct val="20000"/>
+              </a:spcBef>
+              <a:buFont typeface="Arial" pitchFamily="34" charset="0"/>
+              <a:buChar char="•"/>
+              <a:defRPr sz="2000" kern="1200">
+                <a:solidFill>
+                  <a:schemeClr val="tx1"/>
+                </a:solidFill>
+                <a:latin typeface="+mn-lt"/>
+                <a:ea typeface="+mn-ea"/>
+                <a:cs typeface="+mn-cs"/>
+              </a:defRPr>
+            </a:lvl6pPr>
+            <a:lvl7pPr marL="2971800" indent="-228600" algn="l" defTabSz="914400" rtl="0" eaLnBrk="1" latinLnBrk="0" hangingPunct="1">
+              <a:spcBef>
+                <a:spcPct val="20000"/>
+              </a:spcBef>
+              <a:buFont typeface="Arial" pitchFamily="34" charset="0"/>
+              <a:buChar char="•"/>
+              <a:defRPr sz="2000" kern="1200">
+                <a:solidFill>
+                  <a:schemeClr val="tx1"/>
+                </a:solidFill>
+                <a:latin typeface="+mn-lt"/>
+                <a:ea typeface="+mn-ea"/>
+                <a:cs typeface="+mn-cs"/>
+              </a:defRPr>
+            </a:lvl7pPr>
+            <a:lvl8pPr marL="3429000" indent="-228600" algn="l" defTabSz="914400" rtl="0" eaLnBrk="1" latinLnBrk="0" hangingPunct="1">
+              <a:spcBef>
+                <a:spcPct val="20000"/>
+              </a:spcBef>
+              <a:buFont typeface="Arial" pitchFamily="34" charset="0"/>
+              <a:buChar char="•"/>
+              <a:defRPr sz="2000" kern="1200">
+                <a:solidFill>
+                  <a:schemeClr val="tx1"/>
+                </a:solidFill>
+                <a:latin typeface="+mn-lt"/>
+                <a:ea typeface="+mn-ea"/>
+                <a:cs typeface="+mn-cs"/>
+              </a:defRPr>
+            </a:lvl8pPr>
+            <a:lvl9pPr marL="3886200" indent="-228600" algn="l" defTabSz="914400" rtl="0" eaLnBrk="1" latinLnBrk="0" hangingPunct="1">
+              <a:spcBef>
+                <a:spcPct val="20000"/>
+              </a:spcBef>
+              <a:buFont typeface="Arial" pitchFamily="34" charset="0"/>
+              <a:buChar char="•"/>
+              <a:defRPr sz="2000" kern="1200">
+                <a:solidFill>
+                  <a:schemeClr val="tx1"/>
+                </a:solidFill>
+                <a:latin typeface="+mn-lt"/>
+                <a:ea typeface="+mn-ea"/>
+                <a:cs typeface="+mn-cs"/>
+              </a:defRPr>
+            </a:lvl9pPr>
+          </a:lstStyle>
+          <a:p>
+            <a:endParaRPr lang="en-GB" dirty="0"/>
+          </a:p>
+          <a:p>
+            <a:r>
+              <a:rPr lang="en-GB" dirty="0"/>
+              <a:t>Uses UDP port 5353</a:t>
+            </a:r>
+          </a:p>
+          <a:p>
+            <a:r>
+              <a:rPr lang="en-GB" dirty="0"/>
+              <a:t>Multicast IP address: 224.0.0.251 (IPv4)</a:t>
+            </a:r>
+          </a:p>
+          <a:p>
+            <a:r>
+              <a:rPr lang="en-GB" dirty="0"/>
+              <a:t>Devices send queries like 'Who has </a:t>
+            </a:r>
+            <a:r>
+              <a:rPr lang="en-GB" dirty="0" err="1"/>
+              <a:t>myprinter.local</a:t>
+            </a:r>
+            <a:r>
+              <a:rPr lang="en-GB" dirty="0"/>
+              <a:t>?'</a:t>
+            </a:r>
+          </a:p>
+          <a:p>
+            <a:r>
+              <a:rPr lang="en-GB" dirty="0"/>
+              <a:t>The device owning that name responds with its IP address</a:t>
+            </a:r>
+          </a:p>
+          <a:p>
+            <a:r>
+              <a:rPr lang="en-GB" b="1" dirty="0"/>
+              <a:t>Domain names always end in .local</a:t>
+            </a:r>
+          </a:p>
+        </p:txBody>
+      </p:sp>
+      <p:pic>
+        <p:nvPicPr>
+          <p:cNvPr id="5" name="Picture 4">
+            <a:extLst>
+              <a:ext uri="{FF2B5EF4-FFF2-40B4-BE49-F238E27FC236}">
+                <a16:creationId xmlns:a16="http://schemas.microsoft.com/office/drawing/2014/main" id="{16918A04-95E5-8932-10A3-7BD4848E4CBF}"/>
+              </a:ext>
+            </a:extLst>
+          </p:cNvPr>
+          <p:cNvPicPr>
+            <a:picLocks noChangeAspect="1"/>
+          </p:cNvPicPr>
+          <p:nvPr/>
+        </p:nvPicPr>
+        <p:blipFill>
+          <a:blip r:embed="rId3"/>
+          <a:stretch>
+            <a:fillRect/>
+          </a:stretch>
+        </p:blipFill>
+        <p:spPr>
+          <a:xfrm>
+            <a:off x="7457611" y="1771564"/>
+            <a:ext cx="4494704" cy="2168424"/>
+          </a:xfrm>
+          <a:prstGeom prst="rect">
+            <a:avLst/>
+          </a:prstGeom>
+        </p:spPr>
+      </p:pic>
+    </p:spTree>
+    <p:extLst>
+      <p:ext uri="{BB962C8B-B14F-4D97-AF65-F5344CB8AC3E}">
+        <p14:creationId xmlns:p14="http://schemas.microsoft.com/office/powerpoint/2010/main" val="1224855237"/>
+      </p:ext>
+    </p:extLst>
+  </p:cSld>
+  <p:clrMapOvr>
+    <a:masterClrMapping/>
+  </p:clrMapOvr>
+</p:sld>
+</file>
+
+<file path=ppt/slides/slide17.xml><?xml version="1.0" encoding="utf-8"?>
+<p:sld xmlns:a="http://schemas.openxmlformats.org/drawingml/2006/main" xmlns:r="http://schemas.openxmlformats.org/officeDocument/2006/relationships" xmlns:p="http://schemas.openxmlformats.org/presentationml/2006/main">
+  <p:cSld>
+    <p:spTree>
+      <p:nvGrpSpPr>
+        <p:cNvPr id="1" name=""/>
+        <p:cNvGrpSpPr/>
+        <p:nvPr/>
+      </p:nvGrpSpPr>
+      <p:grpSpPr>
+        <a:xfrm>
+          <a:off x="0" y="0"/>
+          <a:ext cx="0" cy="0"/>
+          <a:chOff x="0" y="0"/>
+          <a:chExt cx="0" cy="0"/>
+        </a:xfrm>
+      </p:grpSpPr>
+      <p:sp>
+        <p:nvSpPr>
+          <p:cNvPr id="2" name="Title 1">
+            <a:extLst>
+              <a:ext uri="{FF2B5EF4-FFF2-40B4-BE49-F238E27FC236}">
+                <a16:creationId xmlns:a16="http://schemas.microsoft.com/office/drawing/2014/main" id="{1C901AF1-0AFB-9260-640D-0AF476B9D259}"/>
+              </a:ext>
+            </a:extLst>
+          </p:cNvPr>
+          <p:cNvSpPr txBox="1">
+            <a:spLocks/>
+          </p:cNvSpPr>
+          <p:nvPr/>
+        </p:nvSpPr>
+        <p:spPr>
+          <a:xfrm>
+            <a:off x="1331259" y="274638"/>
+            <a:ext cx="8229600" cy="1143000"/>
+          </a:xfrm>
+          <a:prstGeom prst="rect">
+            <a:avLst/>
+          </a:prstGeom>
+        </p:spPr>
+        <p:txBody>
+          <a:bodyPr/>
+          <a:lstStyle>
+            <a:lvl1pPr algn="ctr" defTabSz="914400" rtl="0" eaLnBrk="1" latinLnBrk="0" hangingPunct="1">
+              <a:spcBef>
+                <a:spcPct val="0"/>
+              </a:spcBef>
+              <a:buNone/>
+              <a:defRPr sz="4400" kern="1200">
+                <a:solidFill>
+                  <a:schemeClr val="tx1"/>
+                </a:solidFill>
+                <a:latin typeface="+mj-lt"/>
+                <a:ea typeface="+mj-ea"/>
+                <a:cs typeface="+mj-cs"/>
+              </a:defRPr>
+            </a:lvl1pPr>
+          </a:lstStyle>
+          <a:p>
+            <a:r>
+              <a:rPr lang="en-IE" dirty="0" err="1"/>
+              <a:t>mDNS</a:t>
+            </a:r>
+            <a:r>
+              <a:rPr lang="en-IE" dirty="0"/>
+              <a:t> Examples and Uses</a:t>
+            </a:r>
+          </a:p>
+        </p:txBody>
+      </p:sp>
+      <p:sp>
+        <p:nvSpPr>
+          <p:cNvPr id="3" name="Content Placeholder 2">
+            <a:extLst>
+              <a:ext uri="{FF2B5EF4-FFF2-40B4-BE49-F238E27FC236}">
+                <a16:creationId xmlns:a16="http://schemas.microsoft.com/office/drawing/2014/main" id="{979A9CF2-EE93-D625-F684-0E128267BBD7}"/>
+              </a:ext>
+            </a:extLst>
+          </p:cNvPr>
+          <p:cNvSpPr txBox="1">
+            <a:spLocks/>
+          </p:cNvSpPr>
+          <p:nvPr/>
+        </p:nvSpPr>
+        <p:spPr>
+          <a:xfrm>
+            <a:off x="578223" y="1277471"/>
+            <a:ext cx="8229600" cy="4525963"/>
+          </a:xfrm>
+          <a:prstGeom prst="rect">
+            <a:avLst/>
+          </a:prstGeom>
+        </p:spPr>
+        <p:txBody>
+          <a:bodyPr wrap="square"/>
+          <a:lstStyle>
+            <a:lvl1pPr marL="342900" indent="-342900" algn="l" defTabSz="914400" rtl="0" eaLnBrk="1" latinLnBrk="0" hangingPunct="1">
+              <a:spcBef>
+                <a:spcPct val="20000"/>
+              </a:spcBef>
+              <a:buFont typeface="Arial" pitchFamily="34" charset="0"/>
+              <a:buChar char="•"/>
+              <a:defRPr sz="3200" kern="1200">
+                <a:solidFill>
+                  <a:schemeClr val="tx1"/>
+                </a:solidFill>
+                <a:latin typeface="+mn-lt"/>
+                <a:ea typeface="+mn-ea"/>
+                <a:cs typeface="+mn-cs"/>
+              </a:defRPr>
+            </a:lvl1pPr>
+            <a:lvl2pPr marL="742950" indent="-285750" algn="l" defTabSz="914400" rtl="0" eaLnBrk="1" latinLnBrk="0" hangingPunct="1">
+              <a:spcBef>
+                <a:spcPct val="20000"/>
+              </a:spcBef>
+              <a:buFont typeface="Arial" pitchFamily="34" charset="0"/>
+              <a:buChar char="–"/>
+              <a:defRPr sz="2800" kern="1200">
+                <a:solidFill>
+                  <a:schemeClr val="tx1"/>
+                </a:solidFill>
+                <a:latin typeface="+mn-lt"/>
+                <a:ea typeface="+mn-ea"/>
+                <a:cs typeface="+mn-cs"/>
+              </a:defRPr>
+            </a:lvl2pPr>
+            <a:lvl3pPr marL="1143000" indent="-228600" algn="l" defTabSz="914400" rtl="0" eaLnBrk="1" latinLnBrk="0" hangingPunct="1">
+              <a:spcBef>
+                <a:spcPct val="20000"/>
+              </a:spcBef>
+              <a:buFont typeface="Arial" pitchFamily="34" charset="0"/>
+              <a:buChar char="•"/>
+              <a:defRPr sz="2400" kern="1200">
+                <a:solidFill>
+                  <a:schemeClr val="tx1"/>
+                </a:solidFill>
+                <a:latin typeface="+mn-lt"/>
+                <a:ea typeface="+mn-ea"/>
+                <a:cs typeface="+mn-cs"/>
+              </a:defRPr>
+            </a:lvl3pPr>
+            <a:lvl4pPr marL="1600200" indent="-228600" algn="l" defTabSz="914400" rtl="0" eaLnBrk="1" latinLnBrk="0" hangingPunct="1">
+              <a:spcBef>
+                <a:spcPct val="20000"/>
+              </a:spcBef>
+              <a:buFont typeface="Arial" pitchFamily="34" charset="0"/>
+              <a:buChar char="–"/>
+              <a:defRPr sz="2000" kern="1200">
+                <a:solidFill>
+                  <a:schemeClr val="tx1"/>
+                </a:solidFill>
+                <a:latin typeface="+mn-lt"/>
+                <a:ea typeface="+mn-ea"/>
+                <a:cs typeface="+mn-cs"/>
+              </a:defRPr>
+            </a:lvl4pPr>
+            <a:lvl5pPr marL="2057400" indent="-228600" algn="l" defTabSz="914400" rtl="0" eaLnBrk="1" latinLnBrk="0" hangingPunct="1">
+              <a:spcBef>
+                <a:spcPct val="20000"/>
+              </a:spcBef>
+              <a:buFont typeface="Arial" pitchFamily="34" charset="0"/>
+              <a:buChar char="»"/>
+              <a:defRPr sz="2000" kern="1200">
+                <a:solidFill>
+                  <a:schemeClr val="tx1"/>
+                </a:solidFill>
+                <a:latin typeface="+mn-lt"/>
+                <a:ea typeface="+mn-ea"/>
+                <a:cs typeface="+mn-cs"/>
+              </a:defRPr>
+            </a:lvl5pPr>
+            <a:lvl6pPr marL="2514600" indent="-228600" algn="l" defTabSz="914400" rtl="0" eaLnBrk="1" latinLnBrk="0" hangingPunct="1">
+              <a:spcBef>
+                <a:spcPct val="20000"/>
+              </a:spcBef>
+              <a:buFont typeface="Arial" pitchFamily="34" charset="0"/>
+              <a:buChar char="•"/>
+              <a:defRPr sz="2000" kern="1200">
+                <a:solidFill>
+                  <a:schemeClr val="tx1"/>
+                </a:solidFill>
+                <a:latin typeface="+mn-lt"/>
+                <a:ea typeface="+mn-ea"/>
+                <a:cs typeface="+mn-cs"/>
+              </a:defRPr>
+            </a:lvl6pPr>
+            <a:lvl7pPr marL="2971800" indent="-228600" algn="l" defTabSz="914400" rtl="0" eaLnBrk="1" latinLnBrk="0" hangingPunct="1">
+              <a:spcBef>
+                <a:spcPct val="20000"/>
+              </a:spcBef>
+              <a:buFont typeface="Arial" pitchFamily="34" charset="0"/>
+              <a:buChar char="•"/>
+              <a:defRPr sz="2000" kern="1200">
+                <a:solidFill>
+                  <a:schemeClr val="tx1"/>
+                </a:solidFill>
+                <a:latin typeface="+mn-lt"/>
+                <a:ea typeface="+mn-ea"/>
+                <a:cs typeface="+mn-cs"/>
+              </a:defRPr>
+            </a:lvl7pPr>
+            <a:lvl8pPr marL="3429000" indent="-228600" algn="l" defTabSz="914400" rtl="0" eaLnBrk="1" latinLnBrk="0" hangingPunct="1">
+              <a:spcBef>
+                <a:spcPct val="20000"/>
+              </a:spcBef>
+              <a:buFont typeface="Arial" pitchFamily="34" charset="0"/>
+              <a:buChar char="•"/>
+              <a:defRPr sz="2000" kern="1200">
+                <a:solidFill>
+                  <a:schemeClr val="tx1"/>
+                </a:solidFill>
+                <a:latin typeface="+mn-lt"/>
+                <a:ea typeface="+mn-ea"/>
+                <a:cs typeface="+mn-cs"/>
+              </a:defRPr>
+            </a:lvl8pPr>
+            <a:lvl9pPr marL="3886200" indent="-228600" algn="l" defTabSz="914400" rtl="0" eaLnBrk="1" latinLnBrk="0" hangingPunct="1">
+              <a:spcBef>
+                <a:spcPct val="20000"/>
+              </a:spcBef>
+              <a:buFont typeface="Arial" pitchFamily="34" charset="0"/>
+              <a:buChar char="•"/>
+              <a:defRPr sz="2000" kern="1200">
+                <a:solidFill>
+                  <a:schemeClr val="tx1"/>
+                </a:solidFill>
+                <a:latin typeface="+mn-lt"/>
+                <a:ea typeface="+mn-ea"/>
+                <a:cs typeface="+mn-cs"/>
+              </a:defRPr>
+            </a:lvl9pPr>
+          </a:lstStyle>
+          <a:p>
+            <a:endParaRPr lang="en-IE" dirty="0"/>
+          </a:p>
+          <a:p>
+            <a:r>
+              <a:rPr lang="en-IE" dirty="0"/>
+              <a:t>Apple’s Bonjour and Linux’s Avahi use </a:t>
+            </a:r>
+            <a:r>
+              <a:rPr lang="en-IE" dirty="0" err="1"/>
+              <a:t>mDNS</a:t>
+            </a:r>
+            <a:endParaRPr lang="en-IE" dirty="0"/>
+          </a:p>
+          <a:p>
+            <a:r>
+              <a:rPr lang="en-IE" dirty="0"/>
+              <a:t>Smart home and IoT devices (e.g., </a:t>
+            </a:r>
+            <a:r>
+              <a:rPr lang="en-IE" dirty="0" err="1"/>
+              <a:t>raspberrypi.local</a:t>
+            </a:r>
+            <a:r>
+              <a:rPr lang="en-IE" dirty="0"/>
+              <a:t>)</a:t>
+            </a:r>
+          </a:p>
+          <a:p>
+            <a:r>
+              <a:rPr lang="en-IE" dirty="0"/>
+              <a:t>Network printers, media servers, and file shares</a:t>
+            </a:r>
+          </a:p>
+          <a:p>
+            <a:r>
+              <a:rPr lang="en-IE" dirty="0"/>
+              <a:t>Simplifies discovery and setup — no need to know IP addresses</a:t>
+            </a:r>
+          </a:p>
+        </p:txBody>
+      </p:sp>
+    </p:spTree>
+    <p:extLst>
+      <p:ext uri="{BB962C8B-B14F-4D97-AF65-F5344CB8AC3E}">
+        <p14:creationId xmlns:p14="http://schemas.microsoft.com/office/powerpoint/2010/main" val="4187418921"/>
+      </p:ext>
+    </p:extLst>
+  </p:cSld>
+  <p:clrMapOvr>
+    <a:masterClrMapping/>
+  </p:clrMapOvr>
+</p:sld>
+</file>
+
+<file path=ppt/slides/slide18.xml><?xml version="1.0" encoding="utf-8"?>
+<p:sld xmlns:a="http://schemas.openxmlformats.org/drawingml/2006/main" xmlns:r="http://schemas.openxmlformats.org/officeDocument/2006/relationships" xmlns:p="http://schemas.openxmlformats.org/presentationml/2006/main">
+  <p:cSld>
+    <p:spTree>
+      <p:nvGrpSpPr>
+        <p:cNvPr id="1" name=""/>
+        <p:cNvGrpSpPr/>
+        <p:nvPr/>
+      </p:nvGrpSpPr>
+      <p:grpSpPr>
+        <a:xfrm>
+          <a:off x="0" y="0"/>
+          <a:ext cx="0" cy="0"/>
+          <a:chOff x="0" y="0"/>
+          <a:chExt cx="0" cy="0"/>
+        </a:xfrm>
+      </p:grpSpPr>
+      <p:sp>
+        <p:nvSpPr>
+          <p:cNvPr id="2" name="TextBox 1">
+            <a:extLst>
+              <a:ext uri="{FF2B5EF4-FFF2-40B4-BE49-F238E27FC236}">
+                <a16:creationId xmlns:a16="http://schemas.microsoft.com/office/drawing/2014/main" id="{61552BB7-597A-98B8-EF46-BA4BE719691C}"/>
+              </a:ext>
+            </a:extLst>
+          </p:cNvPr>
+          <p:cNvSpPr txBox="1"/>
+          <p:nvPr/>
+        </p:nvSpPr>
+        <p:spPr>
+          <a:xfrm>
+            <a:off x="860611" y="1922929"/>
+            <a:ext cx="8216153" cy="2862322"/>
+          </a:xfrm>
+          <a:prstGeom prst="rect">
+            <a:avLst/>
+          </a:prstGeom>
+          <a:noFill/>
+        </p:spPr>
+        <p:txBody>
+          <a:bodyPr wrap="square" rtlCol="0">
+            <a:spAutoFit/>
+          </a:bodyPr>
+          <a:lstStyle/>
+          <a:p>
+            <a:r>
+              <a:rPr lang="en-IE" sz="5400" dirty="0"/>
+              <a:t>CLI Network Configuration on Linux – Overview</a:t>
+            </a:r>
+          </a:p>
+          <a:p>
+            <a:r>
+              <a:rPr lang="en-IE" sz="3600" dirty="0"/>
+              <a:t>Content distilled from </a:t>
+            </a:r>
+            <a:r>
+              <a:rPr lang="en-IE" sz="3600" dirty="0">
+                <a:hlinkClick r:id="rId2"/>
+              </a:rPr>
+              <a:t>Red Hat </a:t>
+            </a:r>
+            <a:r>
+              <a:rPr lang="en-IE" sz="3600" dirty="0" err="1">
+                <a:hlinkClick r:id="rId2"/>
+              </a:rPr>
+              <a:t>Netowrking</a:t>
+            </a:r>
+            <a:r>
+              <a:rPr lang="en-IE" sz="3600" dirty="0">
+                <a:hlinkClick r:id="rId2"/>
+              </a:rPr>
+              <a:t> Guide – Enterprise Linux</a:t>
+            </a:r>
+            <a:endParaRPr lang="en-IE" sz="3600" dirty="0"/>
+          </a:p>
+        </p:txBody>
+      </p:sp>
+    </p:spTree>
+    <p:extLst>
+      <p:ext uri="{BB962C8B-B14F-4D97-AF65-F5344CB8AC3E}">
+        <p14:creationId xmlns:p14="http://schemas.microsoft.com/office/powerpoint/2010/main" val="2184180749"/>
+      </p:ext>
+    </p:extLst>
+  </p:cSld>
+  <p:clrMapOvr>
+    <a:masterClrMapping/>
+  </p:clrMapOvr>
+</p:sld>
+</file>
+
+<file path=ppt/slides/slide19.xml><?xml version="1.0" encoding="utf-8"?>
+<p:sld xmlns:a="http://schemas.openxmlformats.org/drawingml/2006/main" xmlns:r="http://schemas.openxmlformats.org/officeDocument/2006/relationships" xmlns:p="http://schemas.openxmlformats.org/presentationml/2006/main">
+  <p:cSld>
+    <p:spTree>
+      <p:nvGrpSpPr>
+        <p:cNvPr id="1" name=""/>
+        <p:cNvGrpSpPr/>
+        <p:nvPr/>
+      </p:nvGrpSpPr>
+      <p:grpSpPr>
+        <a:xfrm>
+          <a:off x="0" y="0"/>
+          <a:ext cx="0" cy="0"/>
+          <a:chOff x="0" y="0"/>
+          <a:chExt cx="0" cy="0"/>
+        </a:xfrm>
+      </p:grpSpPr>
+      <p:sp>
+        <p:nvSpPr>
+          <p:cNvPr id="2" name="Title 1">
+            <a:extLst>
+              <a:ext uri="{FF2B5EF4-FFF2-40B4-BE49-F238E27FC236}">
+                <a16:creationId xmlns:a16="http://schemas.microsoft.com/office/drawing/2014/main" id="{252EF581-D45F-7E41-3AB0-70D233459CAF}"/>
+              </a:ext>
+            </a:extLst>
+          </p:cNvPr>
+          <p:cNvSpPr txBox="1">
+            <a:spLocks/>
+          </p:cNvSpPr>
+          <p:nvPr/>
+        </p:nvSpPr>
+        <p:spPr>
+          <a:xfrm>
+            <a:off x="457199" y="274638"/>
+            <a:ext cx="9897035" cy="1143000"/>
+          </a:xfrm>
+          <a:prstGeom prst="rect">
+            <a:avLst/>
+          </a:prstGeom>
+        </p:spPr>
+        <p:txBody>
+          <a:bodyPr/>
+          <a:lstStyle>
+            <a:lvl1pPr algn="ctr" defTabSz="914400" rtl="0" eaLnBrk="1" latinLnBrk="0" hangingPunct="1">
+              <a:spcBef>
+                <a:spcPct val="0"/>
+              </a:spcBef>
+              <a:buNone/>
+              <a:defRPr sz="4400" kern="1200">
+                <a:solidFill>
+                  <a:schemeClr val="tx1"/>
+                </a:solidFill>
+                <a:latin typeface="+mj-lt"/>
+                <a:ea typeface="+mj-ea"/>
+                <a:cs typeface="+mj-cs"/>
+              </a:defRPr>
+            </a:lvl1pPr>
+          </a:lstStyle>
+          <a:p>
+            <a:r>
+              <a:rPr lang="en-IE" dirty="0"/>
+              <a:t>Understanding Network Configuration</a:t>
+            </a:r>
+          </a:p>
+        </p:txBody>
+      </p:sp>
+      <p:sp>
+        <p:nvSpPr>
+          <p:cNvPr id="3" name="Content Placeholder 2">
+            <a:extLst>
+              <a:ext uri="{FF2B5EF4-FFF2-40B4-BE49-F238E27FC236}">
+                <a16:creationId xmlns:a16="http://schemas.microsoft.com/office/drawing/2014/main" id="{A42B1D70-504C-3963-2BDC-C3B766CB56B6}"/>
+              </a:ext>
+            </a:extLst>
+          </p:cNvPr>
+          <p:cNvSpPr txBox="1">
+            <a:spLocks/>
+          </p:cNvSpPr>
+          <p:nvPr/>
+        </p:nvSpPr>
+        <p:spPr>
+          <a:xfrm>
+            <a:off x="457200" y="1600200"/>
+            <a:ext cx="8794376" cy="4525963"/>
+          </a:xfrm>
+          <a:prstGeom prst="rect">
+            <a:avLst/>
+          </a:prstGeom>
+        </p:spPr>
+        <p:txBody>
+          <a:bodyPr wrap="square"/>
+          <a:lstStyle>
+            <a:lvl1pPr marL="342900" indent="-342900" algn="l" defTabSz="914400" rtl="0" eaLnBrk="1" latinLnBrk="0" hangingPunct="1">
+              <a:spcBef>
+                <a:spcPct val="20000"/>
+              </a:spcBef>
+              <a:buFont typeface="Arial" pitchFamily="34" charset="0"/>
+              <a:buChar char="•"/>
+              <a:defRPr sz="3200" kern="1200">
+                <a:solidFill>
+                  <a:schemeClr val="tx1"/>
+                </a:solidFill>
+                <a:latin typeface="+mn-lt"/>
+                <a:ea typeface="+mn-ea"/>
+                <a:cs typeface="+mn-cs"/>
+              </a:defRPr>
+            </a:lvl1pPr>
+            <a:lvl2pPr marL="742950" indent="-285750" algn="l" defTabSz="914400" rtl="0" eaLnBrk="1" latinLnBrk="0" hangingPunct="1">
+              <a:spcBef>
+                <a:spcPct val="20000"/>
+              </a:spcBef>
+              <a:buFont typeface="Arial" pitchFamily="34" charset="0"/>
+              <a:buChar char="–"/>
+              <a:defRPr sz="2800" kern="1200">
+                <a:solidFill>
+                  <a:schemeClr val="tx1"/>
+                </a:solidFill>
+                <a:latin typeface="+mn-lt"/>
+                <a:ea typeface="+mn-ea"/>
+                <a:cs typeface="+mn-cs"/>
+              </a:defRPr>
+            </a:lvl2pPr>
+            <a:lvl3pPr marL="1143000" indent="-228600" algn="l" defTabSz="914400" rtl="0" eaLnBrk="1" latinLnBrk="0" hangingPunct="1">
+              <a:spcBef>
+                <a:spcPct val="20000"/>
+              </a:spcBef>
+              <a:buFont typeface="Arial" pitchFamily="34" charset="0"/>
+              <a:buChar char="•"/>
+              <a:defRPr sz="2400" kern="1200">
+                <a:solidFill>
+                  <a:schemeClr val="tx1"/>
+                </a:solidFill>
+                <a:latin typeface="+mn-lt"/>
+                <a:ea typeface="+mn-ea"/>
+                <a:cs typeface="+mn-cs"/>
+              </a:defRPr>
+            </a:lvl3pPr>
+            <a:lvl4pPr marL="1600200" indent="-228600" algn="l" defTabSz="914400" rtl="0" eaLnBrk="1" latinLnBrk="0" hangingPunct="1">
+              <a:spcBef>
+                <a:spcPct val="20000"/>
+              </a:spcBef>
+              <a:buFont typeface="Arial" pitchFamily="34" charset="0"/>
+              <a:buChar char="–"/>
+              <a:defRPr sz="2000" kern="1200">
+                <a:solidFill>
+                  <a:schemeClr val="tx1"/>
+                </a:solidFill>
+                <a:latin typeface="+mn-lt"/>
+                <a:ea typeface="+mn-ea"/>
+                <a:cs typeface="+mn-cs"/>
+              </a:defRPr>
+            </a:lvl4pPr>
+            <a:lvl5pPr marL="2057400" indent="-228600" algn="l" defTabSz="914400" rtl="0" eaLnBrk="1" latinLnBrk="0" hangingPunct="1">
+              <a:spcBef>
+                <a:spcPct val="20000"/>
+              </a:spcBef>
+              <a:buFont typeface="Arial" pitchFamily="34" charset="0"/>
+              <a:buChar char="»"/>
+              <a:defRPr sz="2000" kern="1200">
+                <a:solidFill>
+                  <a:schemeClr val="tx1"/>
+                </a:solidFill>
+                <a:latin typeface="+mn-lt"/>
+                <a:ea typeface="+mn-ea"/>
+                <a:cs typeface="+mn-cs"/>
+              </a:defRPr>
+            </a:lvl5pPr>
+            <a:lvl6pPr marL="2514600" indent="-228600" algn="l" defTabSz="914400" rtl="0" eaLnBrk="1" latinLnBrk="0" hangingPunct="1">
+              <a:spcBef>
+                <a:spcPct val="20000"/>
+              </a:spcBef>
+              <a:buFont typeface="Arial" pitchFamily="34" charset="0"/>
+              <a:buChar char="•"/>
+              <a:defRPr sz="2000" kern="1200">
+                <a:solidFill>
+                  <a:schemeClr val="tx1"/>
+                </a:solidFill>
+                <a:latin typeface="+mn-lt"/>
+                <a:ea typeface="+mn-ea"/>
+                <a:cs typeface="+mn-cs"/>
+              </a:defRPr>
+            </a:lvl6pPr>
+            <a:lvl7pPr marL="2971800" indent="-228600" algn="l" defTabSz="914400" rtl="0" eaLnBrk="1" latinLnBrk="0" hangingPunct="1">
+              <a:spcBef>
+                <a:spcPct val="20000"/>
+              </a:spcBef>
+              <a:buFont typeface="Arial" pitchFamily="34" charset="0"/>
+              <a:buChar char="•"/>
+              <a:defRPr sz="2000" kern="1200">
+                <a:solidFill>
+                  <a:schemeClr val="tx1"/>
+                </a:solidFill>
+                <a:latin typeface="+mn-lt"/>
+                <a:ea typeface="+mn-ea"/>
+                <a:cs typeface="+mn-cs"/>
+              </a:defRPr>
+            </a:lvl7pPr>
+            <a:lvl8pPr marL="3429000" indent="-228600" algn="l" defTabSz="914400" rtl="0" eaLnBrk="1" latinLnBrk="0" hangingPunct="1">
+              <a:spcBef>
+                <a:spcPct val="20000"/>
+              </a:spcBef>
+              <a:buFont typeface="Arial" pitchFamily="34" charset="0"/>
+              <a:buChar char="•"/>
+              <a:defRPr sz="2000" kern="1200">
+                <a:solidFill>
+                  <a:schemeClr val="tx1"/>
+                </a:solidFill>
+                <a:latin typeface="+mn-lt"/>
+                <a:ea typeface="+mn-ea"/>
+                <a:cs typeface="+mn-cs"/>
+              </a:defRPr>
+            </a:lvl8pPr>
+            <a:lvl9pPr marL="3886200" indent="-228600" algn="l" defTabSz="914400" rtl="0" eaLnBrk="1" latinLnBrk="0" hangingPunct="1">
+              <a:spcBef>
+                <a:spcPct val="20000"/>
+              </a:spcBef>
+              <a:buFont typeface="Arial" pitchFamily="34" charset="0"/>
+              <a:buChar char="•"/>
+              <a:defRPr sz="2000" kern="1200">
+                <a:solidFill>
+                  <a:schemeClr val="tx1"/>
+                </a:solidFill>
+                <a:latin typeface="+mn-lt"/>
+                <a:ea typeface="+mn-ea"/>
+                <a:cs typeface="+mn-cs"/>
+              </a:defRPr>
+            </a:lvl9pPr>
+          </a:lstStyle>
+          <a:p>
+            <a:r>
+              <a:rPr lang="en-GB" dirty="0"/>
+              <a:t>Network interfaces identified as </a:t>
+            </a:r>
+            <a:r>
+              <a:rPr lang="en-GB" b="1" dirty="0"/>
+              <a:t>eth0</a:t>
+            </a:r>
+            <a:r>
+              <a:rPr lang="en-GB" dirty="0"/>
+              <a:t>, </a:t>
+            </a:r>
+            <a:r>
+              <a:rPr lang="en-GB" b="1" dirty="0"/>
+              <a:t>wlan0</a:t>
+            </a:r>
+            <a:r>
+              <a:rPr lang="en-GB" dirty="0"/>
+              <a:t>, etc.</a:t>
+            </a:r>
+          </a:p>
+          <a:p>
+            <a:r>
+              <a:rPr lang="en-GB" dirty="0"/>
+              <a:t>Configuration controls how the device connects to a network</a:t>
+            </a:r>
+          </a:p>
+          <a:p>
+            <a:r>
+              <a:rPr lang="en-GB" dirty="0"/>
+              <a:t>Can be managed via GUI, </a:t>
+            </a:r>
+            <a:r>
+              <a:rPr lang="en-GB" dirty="0" err="1"/>
+              <a:t>NetworkManager</a:t>
+            </a:r>
+            <a:r>
+              <a:rPr lang="en-GB" dirty="0"/>
+              <a:t>, or CLI tools</a:t>
+            </a:r>
+          </a:p>
+          <a:p>
+            <a:r>
+              <a:rPr lang="en-GB" b="1" dirty="0"/>
+              <a:t>Command line offers speed, flexibility, and automation</a:t>
+            </a:r>
+          </a:p>
+        </p:txBody>
+      </p:sp>
+    </p:spTree>
+    <p:extLst>
+      <p:ext uri="{BB962C8B-B14F-4D97-AF65-F5344CB8AC3E}">
+        <p14:creationId xmlns:p14="http://schemas.microsoft.com/office/powerpoint/2010/main" val="2707160840"/>
+      </p:ext>
+    </p:extLst>
+  </p:cSld>
+  <p:clrMapOvr>
+    <a:masterClrMapping/>
+  </p:clrMapOvr>
+</p:sld>
+</file>
+
+<file path=ppt/slides/slide2.xml><?xml version="1.0" encoding="utf-8"?>
+<p:sld xmlns:a="http://schemas.openxmlformats.org/drawingml/2006/main" xmlns:r="http://schemas.openxmlformats.org/officeDocument/2006/relationships" xmlns:p="http://schemas.openxmlformats.org/presentationml/2006/main">
+  <p:cSld name="Slide 2">
     <p:bg>
       <p:bgPr>
         <a:blipFill dpi="0" rotWithShape="1">
@@ -2290,23 +4516,9 @@
 </p:sld>
 </file>
 
-<file path=ppt/slides/slide15.xml><?xml version="1.0" encoding="utf-8"?>
+<file path=ppt/slides/slide20.xml><?xml version="1.0" encoding="utf-8"?>
 <p:sld xmlns:a="http://schemas.openxmlformats.org/drawingml/2006/main" xmlns:r="http://schemas.openxmlformats.org/officeDocument/2006/relationships" xmlns:p="http://schemas.openxmlformats.org/presentationml/2006/main">
-  <p:cSld name="Slide 15">
-    <p:bg>
-      <p:bgPr>
-        <a:blipFill dpi="0" rotWithShape="1">
-          <a:blip r:embed="rId3">
-            <a:lum/>
-          </a:blip>
-          <a:srcRect/>
-          <a:stretch>
-            <a:fillRect/>
-          </a:stretch>
-        </a:blipFill>
-        <a:effectLst/>
-      </p:bgPr>
-    </p:bg>
+  <p:cSld>
     <p:spTree>
       <p:nvGrpSpPr>
         <p:cNvPr id="1" name=""/>
@@ -2321,7 +4533,305 @@
           <a:chExt cx="0" cy="0"/>
         </a:xfrm>
       </p:grpSpPr>
+      <p:sp>
+        <p:nvSpPr>
+          <p:cNvPr id="2" name="Title 1">
+            <a:extLst>
+              <a:ext uri="{FF2B5EF4-FFF2-40B4-BE49-F238E27FC236}">
+                <a16:creationId xmlns:a16="http://schemas.microsoft.com/office/drawing/2014/main" id="{59EB8DAB-71D4-0040-4F96-7B88EB623D3E}"/>
+              </a:ext>
+            </a:extLst>
+          </p:cNvPr>
+          <p:cNvSpPr txBox="1">
+            <a:spLocks/>
+          </p:cNvSpPr>
+          <p:nvPr/>
+        </p:nvSpPr>
+        <p:spPr>
+          <a:xfrm>
+            <a:off x="1801906" y="274638"/>
+            <a:ext cx="8229600" cy="1143000"/>
+          </a:xfrm>
+          <a:prstGeom prst="rect">
+            <a:avLst/>
+          </a:prstGeom>
+        </p:spPr>
+        <p:txBody>
+          <a:bodyPr/>
+          <a:lstStyle>
+            <a:lvl1pPr algn="ctr" defTabSz="914400" rtl="0" eaLnBrk="1" latinLnBrk="0" hangingPunct="1">
+              <a:spcBef>
+                <a:spcPct val="0"/>
+              </a:spcBef>
+              <a:buNone/>
+              <a:defRPr sz="4400" kern="1200">
+                <a:solidFill>
+                  <a:schemeClr val="tx1"/>
+                </a:solidFill>
+                <a:latin typeface="+mj-lt"/>
+                <a:ea typeface="+mj-ea"/>
+                <a:cs typeface="+mj-cs"/>
+              </a:defRPr>
+            </a:lvl1pPr>
+          </a:lstStyle>
+          <a:p>
+            <a:r>
+              <a:rPr lang="en-IE"/>
+              <a:t>Viewing Network Interfaces</a:t>
+            </a:r>
+            <a:endParaRPr lang="en-IE" dirty="0"/>
+          </a:p>
+        </p:txBody>
+      </p:sp>
+      <p:sp>
+        <p:nvSpPr>
+          <p:cNvPr id="3" name="Content Placeholder 2">
+            <a:extLst>
+              <a:ext uri="{FF2B5EF4-FFF2-40B4-BE49-F238E27FC236}">
+                <a16:creationId xmlns:a16="http://schemas.microsoft.com/office/drawing/2014/main" id="{8B8400E4-3C0D-AAC9-DDBE-155651E6CDEA}"/>
+              </a:ext>
+            </a:extLst>
+          </p:cNvPr>
+          <p:cNvSpPr txBox="1">
+            <a:spLocks/>
+          </p:cNvSpPr>
+          <p:nvPr/>
+        </p:nvSpPr>
+        <p:spPr>
+          <a:xfrm>
+            <a:off x="457200" y="1413762"/>
+            <a:ext cx="8229600" cy="4525963"/>
+          </a:xfrm>
+          <a:prstGeom prst="rect">
+            <a:avLst/>
+          </a:prstGeom>
+        </p:spPr>
+        <p:txBody>
+          <a:bodyPr wrap="square"/>
+          <a:lstStyle>
+            <a:lvl1pPr marL="342900" indent="-342900" algn="l" defTabSz="914400" rtl="0" eaLnBrk="1" latinLnBrk="0" hangingPunct="1">
+              <a:spcBef>
+                <a:spcPct val="20000"/>
+              </a:spcBef>
+              <a:buFont typeface="Arial" pitchFamily="34" charset="0"/>
+              <a:buChar char="•"/>
+              <a:defRPr sz="3200" kern="1200">
+                <a:solidFill>
+                  <a:schemeClr val="tx1"/>
+                </a:solidFill>
+                <a:latin typeface="+mn-lt"/>
+                <a:ea typeface="+mn-ea"/>
+                <a:cs typeface="+mn-cs"/>
+              </a:defRPr>
+            </a:lvl1pPr>
+            <a:lvl2pPr marL="742950" indent="-285750" algn="l" defTabSz="914400" rtl="0" eaLnBrk="1" latinLnBrk="0" hangingPunct="1">
+              <a:spcBef>
+                <a:spcPct val="20000"/>
+              </a:spcBef>
+              <a:buFont typeface="Arial" pitchFamily="34" charset="0"/>
+              <a:buChar char="–"/>
+              <a:defRPr sz="2800" kern="1200">
+                <a:solidFill>
+                  <a:schemeClr val="tx1"/>
+                </a:solidFill>
+                <a:latin typeface="+mn-lt"/>
+                <a:ea typeface="+mn-ea"/>
+                <a:cs typeface="+mn-cs"/>
+              </a:defRPr>
+            </a:lvl2pPr>
+            <a:lvl3pPr marL="1143000" indent="-228600" algn="l" defTabSz="914400" rtl="0" eaLnBrk="1" latinLnBrk="0" hangingPunct="1">
+              <a:spcBef>
+                <a:spcPct val="20000"/>
+              </a:spcBef>
+              <a:buFont typeface="Arial" pitchFamily="34" charset="0"/>
+              <a:buChar char="•"/>
+              <a:defRPr sz="2400" kern="1200">
+                <a:solidFill>
+                  <a:schemeClr val="tx1"/>
+                </a:solidFill>
+                <a:latin typeface="+mn-lt"/>
+                <a:ea typeface="+mn-ea"/>
+                <a:cs typeface="+mn-cs"/>
+              </a:defRPr>
+            </a:lvl3pPr>
+            <a:lvl4pPr marL="1600200" indent="-228600" algn="l" defTabSz="914400" rtl="0" eaLnBrk="1" latinLnBrk="0" hangingPunct="1">
+              <a:spcBef>
+                <a:spcPct val="20000"/>
+              </a:spcBef>
+              <a:buFont typeface="Arial" pitchFamily="34" charset="0"/>
+              <a:buChar char="–"/>
+              <a:defRPr sz="2000" kern="1200">
+                <a:solidFill>
+                  <a:schemeClr val="tx1"/>
+                </a:solidFill>
+                <a:latin typeface="+mn-lt"/>
+                <a:ea typeface="+mn-ea"/>
+                <a:cs typeface="+mn-cs"/>
+              </a:defRPr>
+            </a:lvl4pPr>
+            <a:lvl5pPr marL="2057400" indent="-228600" algn="l" defTabSz="914400" rtl="0" eaLnBrk="1" latinLnBrk="0" hangingPunct="1">
+              <a:spcBef>
+                <a:spcPct val="20000"/>
+              </a:spcBef>
+              <a:buFont typeface="Arial" pitchFamily="34" charset="0"/>
+              <a:buChar char="»"/>
+              <a:defRPr sz="2000" kern="1200">
+                <a:solidFill>
+                  <a:schemeClr val="tx1"/>
+                </a:solidFill>
+                <a:latin typeface="+mn-lt"/>
+                <a:ea typeface="+mn-ea"/>
+                <a:cs typeface="+mn-cs"/>
+              </a:defRPr>
+            </a:lvl5pPr>
+            <a:lvl6pPr marL="2514600" indent="-228600" algn="l" defTabSz="914400" rtl="0" eaLnBrk="1" latinLnBrk="0" hangingPunct="1">
+              <a:spcBef>
+                <a:spcPct val="20000"/>
+              </a:spcBef>
+              <a:buFont typeface="Arial" pitchFamily="34" charset="0"/>
+              <a:buChar char="•"/>
+              <a:defRPr sz="2000" kern="1200">
+                <a:solidFill>
+                  <a:schemeClr val="tx1"/>
+                </a:solidFill>
+                <a:latin typeface="+mn-lt"/>
+                <a:ea typeface="+mn-ea"/>
+                <a:cs typeface="+mn-cs"/>
+              </a:defRPr>
+            </a:lvl6pPr>
+            <a:lvl7pPr marL="2971800" indent="-228600" algn="l" defTabSz="914400" rtl="0" eaLnBrk="1" latinLnBrk="0" hangingPunct="1">
+              <a:spcBef>
+                <a:spcPct val="20000"/>
+              </a:spcBef>
+              <a:buFont typeface="Arial" pitchFamily="34" charset="0"/>
+              <a:buChar char="•"/>
+              <a:defRPr sz="2000" kern="1200">
+                <a:solidFill>
+                  <a:schemeClr val="tx1"/>
+                </a:solidFill>
+                <a:latin typeface="+mn-lt"/>
+                <a:ea typeface="+mn-ea"/>
+                <a:cs typeface="+mn-cs"/>
+              </a:defRPr>
+            </a:lvl7pPr>
+            <a:lvl8pPr marL="3429000" indent="-228600" algn="l" defTabSz="914400" rtl="0" eaLnBrk="1" latinLnBrk="0" hangingPunct="1">
+              <a:spcBef>
+                <a:spcPct val="20000"/>
+              </a:spcBef>
+              <a:buFont typeface="Arial" pitchFamily="34" charset="0"/>
+              <a:buChar char="•"/>
+              <a:defRPr sz="2000" kern="1200">
+                <a:solidFill>
+                  <a:schemeClr val="tx1"/>
+                </a:solidFill>
+                <a:latin typeface="+mn-lt"/>
+                <a:ea typeface="+mn-ea"/>
+                <a:cs typeface="+mn-cs"/>
+              </a:defRPr>
+            </a:lvl8pPr>
+            <a:lvl9pPr marL="3886200" indent="-228600" algn="l" defTabSz="914400" rtl="0" eaLnBrk="1" latinLnBrk="0" hangingPunct="1">
+              <a:spcBef>
+                <a:spcPct val="20000"/>
+              </a:spcBef>
+              <a:buFont typeface="Arial" pitchFamily="34" charset="0"/>
+              <a:buChar char="•"/>
+              <a:defRPr sz="2000" kern="1200">
+                <a:solidFill>
+                  <a:schemeClr val="tx1"/>
+                </a:solidFill>
+                <a:latin typeface="+mn-lt"/>
+                <a:ea typeface="+mn-ea"/>
+                <a:cs typeface="+mn-cs"/>
+              </a:defRPr>
+            </a:lvl9pPr>
+          </a:lstStyle>
+          <a:p>
+            <a:endParaRPr lang="en-GB" dirty="0"/>
+          </a:p>
+          <a:p>
+            <a:r>
+              <a:rPr lang="en-GB" b="1" dirty="0" err="1"/>
+              <a:t>ip</a:t>
+            </a:r>
+            <a:r>
+              <a:rPr lang="en-GB" b="1" dirty="0"/>
+              <a:t> link show </a:t>
+            </a:r>
+            <a:r>
+              <a:rPr lang="en-GB" dirty="0"/>
+              <a:t>— list all interfaces</a:t>
+            </a:r>
+          </a:p>
+          <a:p>
+            <a:r>
+              <a:rPr lang="en-GB" b="1" dirty="0" err="1"/>
+              <a:t>ip</a:t>
+            </a:r>
+            <a:r>
+              <a:rPr lang="en-GB" b="1" dirty="0"/>
+              <a:t> </a:t>
+            </a:r>
+            <a:r>
+              <a:rPr lang="en-GB" b="1" dirty="0" err="1"/>
+              <a:t>addr</a:t>
+            </a:r>
+            <a:r>
+              <a:rPr lang="en-GB" b="1" dirty="0"/>
+              <a:t> show </a:t>
+            </a:r>
+            <a:r>
+              <a:rPr lang="en-GB" dirty="0"/>
+              <a:t>— show assigned IP addresses</a:t>
+            </a:r>
+          </a:p>
+          <a:p>
+            <a:r>
+              <a:rPr lang="en-GB" b="1" dirty="0" err="1"/>
+              <a:t>ip</a:t>
+            </a:r>
+            <a:r>
+              <a:rPr lang="en-GB" b="1" dirty="0"/>
+              <a:t> route </a:t>
+            </a:r>
+            <a:r>
+              <a:rPr lang="en-GB" dirty="0"/>
+              <a:t>— display routing table</a:t>
+            </a:r>
+          </a:p>
+          <a:p>
+            <a:r>
+              <a:rPr lang="en-GB" b="1" dirty="0"/>
+              <a:t>ping 8.8.8.8 </a:t>
+            </a:r>
+            <a:r>
+              <a:rPr lang="en-GB" dirty="0"/>
+              <a:t>or </a:t>
+            </a:r>
+            <a:r>
+              <a:rPr lang="en-GB" b="1" dirty="0"/>
+              <a:t>ping </a:t>
+            </a:r>
+            <a:r>
+              <a:rPr lang="en-GB" b="1" dirty="0" err="1"/>
+              <a:t>raspberrypi.local</a:t>
+            </a:r>
+            <a:r>
+              <a:rPr lang="en-GB" b="1" dirty="0"/>
+              <a:t> </a:t>
+            </a:r>
+            <a:r>
+              <a:rPr lang="en-GB" dirty="0"/>
+              <a:t>— test connectivity</a:t>
+            </a:r>
+          </a:p>
+        </p:txBody>
+      </p:sp>
     </p:spTree>
+    <p:extLst>
+      <p:ext uri="{BB962C8B-B14F-4D97-AF65-F5344CB8AC3E}">
+        <p14:creationId xmlns:p14="http://schemas.microsoft.com/office/powerpoint/2010/main" val="1432385842"/>
+      </p:ext>
+    </p:extLst>
   </p:cSld>
   <p:clrMapOvr>
     <a:masterClrMapping/>
@@ -2329,23 +4839,9 @@
 </p:sld>
 </file>
 
-<file path=ppt/slides/slide16.xml><?xml version="1.0" encoding="utf-8"?>
+<file path=ppt/slides/slide21.xml><?xml version="1.0" encoding="utf-8"?>
 <p:sld xmlns:a="http://schemas.openxmlformats.org/drawingml/2006/main" xmlns:r="http://schemas.openxmlformats.org/officeDocument/2006/relationships" xmlns:p="http://schemas.openxmlformats.org/presentationml/2006/main">
-  <p:cSld name="Slide 16">
-    <p:bg>
-      <p:bgPr>
-        <a:blipFill dpi="0" rotWithShape="1">
-          <a:blip r:embed="rId3">
-            <a:lum/>
-          </a:blip>
-          <a:srcRect/>
-          <a:stretch>
-            <a:fillRect/>
-          </a:stretch>
-        </a:blipFill>
-        <a:effectLst/>
-      </p:bgPr>
-    </p:bg>
+  <p:cSld>
     <p:spTree>
       <p:nvGrpSpPr>
         <p:cNvPr id="1" name=""/>
@@ -2360,7 +4856,365 @@
           <a:chExt cx="0" cy="0"/>
         </a:xfrm>
       </p:grpSpPr>
+      <p:sp>
+        <p:nvSpPr>
+          <p:cNvPr id="2" name="Title 1">
+            <a:extLst>
+              <a:ext uri="{FF2B5EF4-FFF2-40B4-BE49-F238E27FC236}">
+                <a16:creationId xmlns:a16="http://schemas.microsoft.com/office/drawing/2014/main" id="{2185FD0B-F900-4CCB-DF8C-DF14FE945D22}"/>
+              </a:ext>
+            </a:extLst>
+          </p:cNvPr>
+          <p:cNvSpPr txBox="1">
+            <a:spLocks/>
+          </p:cNvSpPr>
+          <p:nvPr/>
+        </p:nvSpPr>
+        <p:spPr>
+          <a:xfrm>
+            <a:off x="1438835" y="436003"/>
+            <a:ext cx="8229600" cy="1143000"/>
+          </a:xfrm>
+          <a:prstGeom prst="rect">
+            <a:avLst/>
+          </a:prstGeom>
+        </p:spPr>
+        <p:txBody>
+          <a:bodyPr/>
+          <a:lstStyle>
+            <a:lvl1pPr algn="ctr" defTabSz="914400" rtl="0" eaLnBrk="1" latinLnBrk="0" hangingPunct="1">
+              <a:spcBef>
+                <a:spcPct val="0"/>
+              </a:spcBef>
+              <a:buNone/>
+              <a:defRPr sz="4400" kern="1200">
+                <a:solidFill>
+                  <a:schemeClr val="tx1"/>
+                </a:solidFill>
+                <a:latin typeface="+mj-lt"/>
+                <a:ea typeface="+mj-ea"/>
+                <a:cs typeface="+mj-cs"/>
+              </a:defRPr>
+            </a:lvl1pPr>
+          </a:lstStyle>
+          <a:p>
+            <a:r>
+              <a:rPr lang="en-IE"/>
+              <a:t>Temporary Network Configuration</a:t>
+            </a:r>
+            <a:endParaRPr lang="en-IE" dirty="0"/>
+          </a:p>
+        </p:txBody>
+      </p:sp>
+      <p:sp>
+        <p:nvSpPr>
+          <p:cNvPr id="3" name="Content Placeholder 2">
+            <a:extLst>
+              <a:ext uri="{FF2B5EF4-FFF2-40B4-BE49-F238E27FC236}">
+                <a16:creationId xmlns:a16="http://schemas.microsoft.com/office/drawing/2014/main" id="{B257260D-E09F-0C22-06F0-3E6FCAF20BB4}"/>
+              </a:ext>
+            </a:extLst>
+          </p:cNvPr>
+          <p:cNvSpPr txBox="1">
+            <a:spLocks/>
+          </p:cNvSpPr>
+          <p:nvPr/>
+        </p:nvSpPr>
+        <p:spPr>
+          <a:xfrm>
+            <a:off x="457200" y="1290917"/>
+            <a:ext cx="10972800" cy="4525963"/>
+          </a:xfrm>
+          <a:prstGeom prst="rect">
+            <a:avLst/>
+          </a:prstGeom>
+        </p:spPr>
+        <p:txBody>
+          <a:bodyPr wrap="square"/>
+          <a:lstStyle>
+            <a:lvl1pPr marL="342900" indent="-342900" algn="l" defTabSz="914400" rtl="0" eaLnBrk="1" latinLnBrk="0" hangingPunct="1">
+              <a:spcBef>
+                <a:spcPct val="20000"/>
+              </a:spcBef>
+              <a:buFont typeface="Arial" pitchFamily="34" charset="0"/>
+              <a:buChar char="•"/>
+              <a:defRPr sz="3200" kern="1200">
+                <a:solidFill>
+                  <a:schemeClr val="tx1"/>
+                </a:solidFill>
+                <a:latin typeface="+mn-lt"/>
+                <a:ea typeface="+mn-ea"/>
+                <a:cs typeface="+mn-cs"/>
+              </a:defRPr>
+            </a:lvl1pPr>
+            <a:lvl2pPr marL="742950" indent="-285750" algn="l" defTabSz="914400" rtl="0" eaLnBrk="1" latinLnBrk="0" hangingPunct="1">
+              <a:spcBef>
+                <a:spcPct val="20000"/>
+              </a:spcBef>
+              <a:buFont typeface="Arial" pitchFamily="34" charset="0"/>
+              <a:buChar char="–"/>
+              <a:defRPr sz="2800" kern="1200">
+                <a:solidFill>
+                  <a:schemeClr val="tx1"/>
+                </a:solidFill>
+                <a:latin typeface="+mn-lt"/>
+                <a:ea typeface="+mn-ea"/>
+                <a:cs typeface="+mn-cs"/>
+              </a:defRPr>
+            </a:lvl2pPr>
+            <a:lvl3pPr marL="1143000" indent="-228600" algn="l" defTabSz="914400" rtl="0" eaLnBrk="1" latinLnBrk="0" hangingPunct="1">
+              <a:spcBef>
+                <a:spcPct val="20000"/>
+              </a:spcBef>
+              <a:buFont typeface="Arial" pitchFamily="34" charset="0"/>
+              <a:buChar char="•"/>
+              <a:defRPr sz="2400" kern="1200">
+                <a:solidFill>
+                  <a:schemeClr val="tx1"/>
+                </a:solidFill>
+                <a:latin typeface="+mn-lt"/>
+                <a:ea typeface="+mn-ea"/>
+                <a:cs typeface="+mn-cs"/>
+              </a:defRPr>
+            </a:lvl3pPr>
+            <a:lvl4pPr marL="1600200" indent="-228600" algn="l" defTabSz="914400" rtl="0" eaLnBrk="1" latinLnBrk="0" hangingPunct="1">
+              <a:spcBef>
+                <a:spcPct val="20000"/>
+              </a:spcBef>
+              <a:buFont typeface="Arial" pitchFamily="34" charset="0"/>
+              <a:buChar char="–"/>
+              <a:defRPr sz="2000" kern="1200">
+                <a:solidFill>
+                  <a:schemeClr val="tx1"/>
+                </a:solidFill>
+                <a:latin typeface="+mn-lt"/>
+                <a:ea typeface="+mn-ea"/>
+                <a:cs typeface="+mn-cs"/>
+              </a:defRPr>
+            </a:lvl4pPr>
+            <a:lvl5pPr marL="2057400" indent="-228600" algn="l" defTabSz="914400" rtl="0" eaLnBrk="1" latinLnBrk="0" hangingPunct="1">
+              <a:spcBef>
+                <a:spcPct val="20000"/>
+              </a:spcBef>
+              <a:buFont typeface="Arial" pitchFamily="34" charset="0"/>
+              <a:buChar char="»"/>
+              <a:defRPr sz="2000" kern="1200">
+                <a:solidFill>
+                  <a:schemeClr val="tx1"/>
+                </a:solidFill>
+                <a:latin typeface="+mn-lt"/>
+                <a:ea typeface="+mn-ea"/>
+                <a:cs typeface="+mn-cs"/>
+              </a:defRPr>
+            </a:lvl5pPr>
+            <a:lvl6pPr marL="2514600" indent="-228600" algn="l" defTabSz="914400" rtl="0" eaLnBrk="1" latinLnBrk="0" hangingPunct="1">
+              <a:spcBef>
+                <a:spcPct val="20000"/>
+              </a:spcBef>
+              <a:buFont typeface="Arial" pitchFamily="34" charset="0"/>
+              <a:buChar char="•"/>
+              <a:defRPr sz="2000" kern="1200">
+                <a:solidFill>
+                  <a:schemeClr val="tx1"/>
+                </a:solidFill>
+                <a:latin typeface="+mn-lt"/>
+                <a:ea typeface="+mn-ea"/>
+                <a:cs typeface="+mn-cs"/>
+              </a:defRPr>
+            </a:lvl6pPr>
+            <a:lvl7pPr marL="2971800" indent="-228600" algn="l" defTabSz="914400" rtl="0" eaLnBrk="1" latinLnBrk="0" hangingPunct="1">
+              <a:spcBef>
+                <a:spcPct val="20000"/>
+              </a:spcBef>
+              <a:buFont typeface="Arial" pitchFamily="34" charset="0"/>
+              <a:buChar char="•"/>
+              <a:defRPr sz="2000" kern="1200">
+                <a:solidFill>
+                  <a:schemeClr val="tx1"/>
+                </a:solidFill>
+                <a:latin typeface="+mn-lt"/>
+                <a:ea typeface="+mn-ea"/>
+                <a:cs typeface="+mn-cs"/>
+              </a:defRPr>
+            </a:lvl7pPr>
+            <a:lvl8pPr marL="3429000" indent="-228600" algn="l" defTabSz="914400" rtl="0" eaLnBrk="1" latinLnBrk="0" hangingPunct="1">
+              <a:spcBef>
+                <a:spcPct val="20000"/>
+              </a:spcBef>
+              <a:buFont typeface="Arial" pitchFamily="34" charset="0"/>
+              <a:buChar char="•"/>
+              <a:defRPr sz="2000" kern="1200">
+                <a:solidFill>
+                  <a:schemeClr val="tx1"/>
+                </a:solidFill>
+                <a:latin typeface="+mn-lt"/>
+                <a:ea typeface="+mn-ea"/>
+                <a:cs typeface="+mn-cs"/>
+              </a:defRPr>
+            </a:lvl8pPr>
+            <a:lvl9pPr marL="3886200" indent="-228600" algn="l" defTabSz="914400" rtl="0" eaLnBrk="1" latinLnBrk="0" hangingPunct="1">
+              <a:spcBef>
+                <a:spcPct val="20000"/>
+              </a:spcBef>
+              <a:buFont typeface="Arial" pitchFamily="34" charset="0"/>
+              <a:buChar char="•"/>
+              <a:defRPr sz="2000" kern="1200">
+                <a:solidFill>
+                  <a:schemeClr val="tx1"/>
+                </a:solidFill>
+                <a:latin typeface="+mn-lt"/>
+                <a:ea typeface="+mn-ea"/>
+                <a:cs typeface="+mn-cs"/>
+              </a:defRPr>
+            </a:lvl9pPr>
+          </a:lstStyle>
+          <a:p>
+            <a:endParaRPr lang="en-IE" dirty="0"/>
+          </a:p>
+          <a:p>
+            <a:r>
+              <a:rPr lang="en-IE" dirty="0"/>
+              <a:t>Assign IP: </a:t>
+            </a:r>
+            <a:r>
+              <a:rPr lang="en-IE" dirty="0" err="1">
+                <a:highlight>
+                  <a:srgbClr val="C0C0C0"/>
+                </a:highlight>
+              </a:rPr>
+              <a:t>sudo</a:t>
+            </a:r>
+            <a:r>
+              <a:rPr lang="en-IE" dirty="0">
+                <a:highlight>
+                  <a:srgbClr val="C0C0C0"/>
+                </a:highlight>
+              </a:rPr>
+              <a:t> </a:t>
+            </a:r>
+            <a:r>
+              <a:rPr lang="en-IE" dirty="0" err="1">
+                <a:highlight>
+                  <a:srgbClr val="C0C0C0"/>
+                </a:highlight>
+              </a:rPr>
+              <a:t>ip</a:t>
+            </a:r>
+            <a:r>
+              <a:rPr lang="en-IE" dirty="0">
+                <a:highlight>
+                  <a:srgbClr val="C0C0C0"/>
+                </a:highlight>
+              </a:rPr>
+              <a:t> </a:t>
+            </a:r>
+            <a:r>
+              <a:rPr lang="en-IE" dirty="0" err="1">
+                <a:highlight>
+                  <a:srgbClr val="C0C0C0"/>
+                </a:highlight>
+              </a:rPr>
+              <a:t>addr</a:t>
+            </a:r>
+            <a:r>
+              <a:rPr lang="en-IE" dirty="0">
+                <a:highlight>
+                  <a:srgbClr val="C0C0C0"/>
+                </a:highlight>
+              </a:rPr>
+              <a:t> add 192.168.1.10/24 dev eth0</a:t>
+            </a:r>
+          </a:p>
+          <a:p>
+            <a:r>
+              <a:rPr lang="en-IE" dirty="0"/>
+              <a:t>Bring interface up/down: </a:t>
+            </a:r>
+            <a:r>
+              <a:rPr lang="en-IE" dirty="0" err="1">
+                <a:highlight>
+                  <a:srgbClr val="C0C0C0"/>
+                </a:highlight>
+              </a:rPr>
+              <a:t>sudo</a:t>
+            </a:r>
+            <a:r>
+              <a:rPr lang="en-IE" dirty="0">
+                <a:highlight>
+                  <a:srgbClr val="C0C0C0"/>
+                </a:highlight>
+              </a:rPr>
+              <a:t> </a:t>
+            </a:r>
+            <a:r>
+              <a:rPr lang="en-IE" dirty="0" err="1">
+                <a:highlight>
+                  <a:srgbClr val="C0C0C0"/>
+                </a:highlight>
+              </a:rPr>
+              <a:t>ip</a:t>
+            </a:r>
+            <a:r>
+              <a:rPr lang="en-IE" dirty="0">
+                <a:highlight>
+                  <a:srgbClr val="C0C0C0"/>
+                </a:highlight>
+              </a:rPr>
+              <a:t> link set eth0 up / down</a:t>
+            </a:r>
+          </a:p>
+          <a:p>
+            <a:r>
+              <a:rPr lang="en-IE" dirty="0"/>
+              <a:t>Add route: </a:t>
+            </a:r>
+            <a:r>
+              <a:rPr lang="en-IE" dirty="0" err="1">
+                <a:highlight>
+                  <a:srgbClr val="C0C0C0"/>
+                </a:highlight>
+              </a:rPr>
+              <a:t>sudo</a:t>
+            </a:r>
+            <a:r>
+              <a:rPr lang="en-IE" dirty="0">
+                <a:highlight>
+                  <a:srgbClr val="C0C0C0"/>
+                </a:highlight>
+              </a:rPr>
+              <a:t> </a:t>
+            </a:r>
+            <a:r>
+              <a:rPr lang="en-IE" dirty="0" err="1">
+                <a:highlight>
+                  <a:srgbClr val="C0C0C0"/>
+                </a:highlight>
+              </a:rPr>
+              <a:t>ip</a:t>
+            </a:r>
+            <a:r>
+              <a:rPr lang="en-IE" dirty="0">
+                <a:highlight>
+                  <a:srgbClr val="C0C0C0"/>
+                </a:highlight>
+              </a:rPr>
+              <a:t> route add default via 192.168.1.1</a:t>
+            </a:r>
+          </a:p>
+          <a:p>
+            <a:r>
+              <a:rPr lang="en-IE" b="1" dirty="0"/>
+              <a:t>Temporary only — lost after reboot</a:t>
+            </a:r>
+          </a:p>
+        </p:txBody>
+      </p:sp>
     </p:spTree>
+    <p:extLst>
+      <p:ext uri="{BB962C8B-B14F-4D97-AF65-F5344CB8AC3E}">
+        <p14:creationId xmlns:p14="http://schemas.microsoft.com/office/powerpoint/2010/main" val="2862489728"/>
+      </p:ext>
+    </p:extLst>
   </p:cSld>
   <p:clrMapOvr>
     <a:masterClrMapping/>
@@ -2368,9 +5222,874 @@
 </p:sld>
 </file>
 
-<file path=ppt/slides/slide2.xml><?xml version="1.0" encoding="utf-8"?>
+<file path=ppt/slides/slide22.xml><?xml version="1.0" encoding="utf-8"?>
 <p:sld xmlns:a="http://schemas.openxmlformats.org/drawingml/2006/main" xmlns:r="http://schemas.openxmlformats.org/officeDocument/2006/relationships" xmlns:p="http://schemas.openxmlformats.org/presentationml/2006/main">
-  <p:cSld name="Slide 2">
+  <p:cSld>
+    <p:spTree>
+      <p:nvGrpSpPr>
+        <p:cNvPr id="1" name=""/>
+        <p:cNvGrpSpPr/>
+        <p:nvPr/>
+      </p:nvGrpSpPr>
+      <p:grpSpPr>
+        <a:xfrm>
+          <a:off x="0" y="0"/>
+          <a:ext cx="0" cy="0"/>
+          <a:chOff x="0" y="0"/>
+          <a:chExt cx="0" cy="0"/>
+        </a:xfrm>
+      </p:grpSpPr>
+      <p:sp>
+        <p:nvSpPr>
+          <p:cNvPr id="2" name="Title 1">
+            <a:extLst>
+              <a:ext uri="{FF2B5EF4-FFF2-40B4-BE49-F238E27FC236}">
+                <a16:creationId xmlns:a16="http://schemas.microsoft.com/office/drawing/2014/main" id="{3D173B24-9860-88E9-5141-ABBBDE7C1E7B}"/>
+              </a:ext>
+            </a:extLst>
+          </p:cNvPr>
+          <p:cNvSpPr txBox="1">
+            <a:spLocks/>
+          </p:cNvSpPr>
+          <p:nvPr/>
+        </p:nvSpPr>
+        <p:spPr>
+          <a:xfrm>
+            <a:off x="1640541" y="476344"/>
+            <a:ext cx="8229600" cy="1143000"/>
+          </a:xfrm>
+          <a:prstGeom prst="rect">
+            <a:avLst/>
+          </a:prstGeom>
+        </p:spPr>
+        <p:txBody>
+          <a:bodyPr/>
+          <a:lstStyle>
+            <a:lvl1pPr algn="ctr" defTabSz="914400" rtl="0" eaLnBrk="1" latinLnBrk="0" hangingPunct="1">
+              <a:spcBef>
+                <a:spcPct val="0"/>
+              </a:spcBef>
+              <a:buNone/>
+              <a:defRPr sz="4400" kern="1200">
+                <a:solidFill>
+                  <a:schemeClr val="tx1"/>
+                </a:solidFill>
+                <a:latin typeface="+mj-lt"/>
+                <a:ea typeface="+mj-ea"/>
+                <a:cs typeface="+mj-cs"/>
+              </a:defRPr>
+            </a:lvl1pPr>
+          </a:lstStyle>
+          <a:p>
+            <a:r>
+              <a:rPr lang="en-IE" dirty="0"/>
+              <a:t>Managing Network with </a:t>
+            </a:r>
+            <a:r>
+              <a:rPr lang="en-IE" b="1" dirty="0" err="1"/>
+              <a:t>nmcli</a:t>
+            </a:r>
+            <a:endParaRPr lang="en-IE" b="1" dirty="0"/>
+          </a:p>
+        </p:txBody>
+      </p:sp>
+      <p:sp>
+        <p:nvSpPr>
+          <p:cNvPr id="3" name="Content Placeholder 2">
+            <a:extLst>
+              <a:ext uri="{FF2B5EF4-FFF2-40B4-BE49-F238E27FC236}">
+                <a16:creationId xmlns:a16="http://schemas.microsoft.com/office/drawing/2014/main" id="{DE24D146-72D1-5A27-3B3B-B51015C11BE6}"/>
+              </a:ext>
+            </a:extLst>
+          </p:cNvPr>
+          <p:cNvSpPr txBox="1">
+            <a:spLocks/>
+          </p:cNvSpPr>
+          <p:nvPr/>
+        </p:nvSpPr>
+        <p:spPr>
+          <a:xfrm>
+            <a:off x="457200" y="1088185"/>
+            <a:ext cx="11734800" cy="4525963"/>
+          </a:xfrm>
+          <a:prstGeom prst="rect">
+            <a:avLst/>
+          </a:prstGeom>
+        </p:spPr>
+        <p:txBody>
+          <a:bodyPr wrap="square"/>
+          <a:lstStyle>
+            <a:lvl1pPr marL="342900" indent="-342900" algn="l" defTabSz="914400" rtl="0" eaLnBrk="1" latinLnBrk="0" hangingPunct="1">
+              <a:spcBef>
+                <a:spcPct val="20000"/>
+              </a:spcBef>
+              <a:buFont typeface="Arial" pitchFamily="34" charset="0"/>
+              <a:buChar char="•"/>
+              <a:defRPr sz="3200" kern="1200">
+                <a:solidFill>
+                  <a:schemeClr val="tx1"/>
+                </a:solidFill>
+                <a:latin typeface="+mn-lt"/>
+                <a:ea typeface="+mn-ea"/>
+                <a:cs typeface="+mn-cs"/>
+              </a:defRPr>
+            </a:lvl1pPr>
+            <a:lvl2pPr marL="742950" indent="-285750" algn="l" defTabSz="914400" rtl="0" eaLnBrk="1" latinLnBrk="0" hangingPunct="1">
+              <a:spcBef>
+                <a:spcPct val="20000"/>
+              </a:spcBef>
+              <a:buFont typeface="Arial" pitchFamily="34" charset="0"/>
+              <a:buChar char="–"/>
+              <a:defRPr sz="2800" kern="1200">
+                <a:solidFill>
+                  <a:schemeClr val="tx1"/>
+                </a:solidFill>
+                <a:latin typeface="+mn-lt"/>
+                <a:ea typeface="+mn-ea"/>
+                <a:cs typeface="+mn-cs"/>
+              </a:defRPr>
+            </a:lvl2pPr>
+            <a:lvl3pPr marL="1143000" indent="-228600" algn="l" defTabSz="914400" rtl="0" eaLnBrk="1" latinLnBrk="0" hangingPunct="1">
+              <a:spcBef>
+                <a:spcPct val="20000"/>
+              </a:spcBef>
+              <a:buFont typeface="Arial" pitchFamily="34" charset="0"/>
+              <a:buChar char="•"/>
+              <a:defRPr sz="2400" kern="1200">
+                <a:solidFill>
+                  <a:schemeClr val="tx1"/>
+                </a:solidFill>
+                <a:latin typeface="+mn-lt"/>
+                <a:ea typeface="+mn-ea"/>
+                <a:cs typeface="+mn-cs"/>
+              </a:defRPr>
+            </a:lvl3pPr>
+            <a:lvl4pPr marL="1600200" indent="-228600" algn="l" defTabSz="914400" rtl="0" eaLnBrk="1" latinLnBrk="0" hangingPunct="1">
+              <a:spcBef>
+                <a:spcPct val="20000"/>
+              </a:spcBef>
+              <a:buFont typeface="Arial" pitchFamily="34" charset="0"/>
+              <a:buChar char="–"/>
+              <a:defRPr sz="2000" kern="1200">
+                <a:solidFill>
+                  <a:schemeClr val="tx1"/>
+                </a:solidFill>
+                <a:latin typeface="+mn-lt"/>
+                <a:ea typeface="+mn-ea"/>
+                <a:cs typeface="+mn-cs"/>
+              </a:defRPr>
+            </a:lvl4pPr>
+            <a:lvl5pPr marL="2057400" indent="-228600" algn="l" defTabSz="914400" rtl="0" eaLnBrk="1" latinLnBrk="0" hangingPunct="1">
+              <a:spcBef>
+                <a:spcPct val="20000"/>
+              </a:spcBef>
+              <a:buFont typeface="Arial" pitchFamily="34" charset="0"/>
+              <a:buChar char="»"/>
+              <a:defRPr sz="2000" kern="1200">
+                <a:solidFill>
+                  <a:schemeClr val="tx1"/>
+                </a:solidFill>
+                <a:latin typeface="+mn-lt"/>
+                <a:ea typeface="+mn-ea"/>
+                <a:cs typeface="+mn-cs"/>
+              </a:defRPr>
+            </a:lvl5pPr>
+            <a:lvl6pPr marL="2514600" indent="-228600" algn="l" defTabSz="914400" rtl="0" eaLnBrk="1" latinLnBrk="0" hangingPunct="1">
+              <a:spcBef>
+                <a:spcPct val="20000"/>
+              </a:spcBef>
+              <a:buFont typeface="Arial" pitchFamily="34" charset="0"/>
+              <a:buChar char="•"/>
+              <a:defRPr sz="2000" kern="1200">
+                <a:solidFill>
+                  <a:schemeClr val="tx1"/>
+                </a:solidFill>
+                <a:latin typeface="+mn-lt"/>
+                <a:ea typeface="+mn-ea"/>
+                <a:cs typeface="+mn-cs"/>
+              </a:defRPr>
+            </a:lvl6pPr>
+            <a:lvl7pPr marL="2971800" indent="-228600" algn="l" defTabSz="914400" rtl="0" eaLnBrk="1" latinLnBrk="0" hangingPunct="1">
+              <a:spcBef>
+                <a:spcPct val="20000"/>
+              </a:spcBef>
+              <a:buFont typeface="Arial" pitchFamily="34" charset="0"/>
+              <a:buChar char="•"/>
+              <a:defRPr sz="2000" kern="1200">
+                <a:solidFill>
+                  <a:schemeClr val="tx1"/>
+                </a:solidFill>
+                <a:latin typeface="+mn-lt"/>
+                <a:ea typeface="+mn-ea"/>
+                <a:cs typeface="+mn-cs"/>
+              </a:defRPr>
+            </a:lvl7pPr>
+            <a:lvl8pPr marL="3429000" indent="-228600" algn="l" defTabSz="914400" rtl="0" eaLnBrk="1" latinLnBrk="0" hangingPunct="1">
+              <a:spcBef>
+                <a:spcPct val="20000"/>
+              </a:spcBef>
+              <a:buFont typeface="Arial" pitchFamily="34" charset="0"/>
+              <a:buChar char="•"/>
+              <a:defRPr sz="2000" kern="1200">
+                <a:solidFill>
+                  <a:schemeClr val="tx1"/>
+                </a:solidFill>
+                <a:latin typeface="+mn-lt"/>
+                <a:ea typeface="+mn-ea"/>
+                <a:cs typeface="+mn-cs"/>
+              </a:defRPr>
+            </a:lvl8pPr>
+            <a:lvl9pPr marL="3886200" indent="-228600" algn="l" defTabSz="914400" rtl="0" eaLnBrk="1" latinLnBrk="0" hangingPunct="1">
+              <a:spcBef>
+                <a:spcPct val="20000"/>
+              </a:spcBef>
+              <a:buFont typeface="Arial" pitchFamily="34" charset="0"/>
+              <a:buChar char="•"/>
+              <a:defRPr sz="2000" kern="1200">
+                <a:solidFill>
+                  <a:schemeClr val="tx1"/>
+                </a:solidFill>
+                <a:latin typeface="+mn-lt"/>
+                <a:ea typeface="+mn-ea"/>
+                <a:cs typeface="+mn-cs"/>
+              </a:defRPr>
+            </a:lvl9pPr>
+          </a:lstStyle>
+          <a:p>
+            <a:endParaRPr lang="en-IE" dirty="0"/>
+          </a:p>
+          <a:p>
+            <a:r>
+              <a:rPr lang="en-IE" dirty="0"/>
+              <a:t>show interfaces : </a:t>
+            </a:r>
+            <a:r>
+              <a:rPr lang="en-IE" sz="2400" dirty="0" err="1">
+                <a:highlight>
+                  <a:srgbClr val="C0C0C0"/>
+                </a:highlight>
+                <a:latin typeface="Courier New" panose="02070309020205020404" pitchFamily="49" charset="0"/>
+                <a:cs typeface="Courier New" panose="02070309020205020404" pitchFamily="49" charset="0"/>
+              </a:rPr>
+              <a:t>nmcli</a:t>
+            </a:r>
+            <a:r>
+              <a:rPr lang="en-IE" sz="2400" dirty="0">
+                <a:highlight>
+                  <a:srgbClr val="C0C0C0"/>
+                </a:highlight>
+                <a:latin typeface="Courier New" panose="02070309020205020404" pitchFamily="49" charset="0"/>
+                <a:cs typeface="Courier New" panose="02070309020205020404" pitchFamily="49" charset="0"/>
+              </a:rPr>
+              <a:t> device status </a:t>
+            </a:r>
+            <a:endParaRPr lang="en-IE" dirty="0">
+              <a:highlight>
+                <a:srgbClr val="C0C0C0"/>
+              </a:highlight>
+              <a:latin typeface="Courier New" panose="02070309020205020404" pitchFamily="49" charset="0"/>
+              <a:cs typeface="Courier New" panose="02070309020205020404" pitchFamily="49" charset="0"/>
+            </a:endParaRPr>
+          </a:p>
+          <a:p>
+            <a:r>
+              <a:rPr lang="en-IE" dirty="0"/>
+              <a:t>list saved connections: </a:t>
+            </a:r>
+            <a:r>
+              <a:rPr lang="en-IE" sz="2400" dirty="0" err="1">
+                <a:highlight>
+                  <a:srgbClr val="C0C0C0"/>
+                </a:highlight>
+                <a:latin typeface="Courier New" panose="02070309020205020404" pitchFamily="49" charset="0"/>
+                <a:cs typeface="Courier New" panose="02070309020205020404" pitchFamily="49" charset="0"/>
+              </a:rPr>
+              <a:t>nmcli</a:t>
+            </a:r>
+            <a:r>
+              <a:rPr lang="en-IE" sz="2400" dirty="0">
+                <a:highlight>
+                  <a:srgbClr val="C0C0C0"/>
+                </a:highlight>
+                <a:latin typeface="Courier New" panose="02070309020205020404" pitchFamily="49" charset="0"/>
+                <a:cs typeface="Courier New" panose="02070309020205020404" pitchFamily="49" charset="0"/>
+              </a:rPr>
+              <a:t> connection show</a:t>
+            </a:r>
+            <a:endParaRPr lang="en-IE" dirty="0">
+              <a:highlight>
+                <a:srgbClr val="C0C0C0"/>
+              </a:highlight>
+              <a:latin typeface="Courier New" panose="02070309020205020404" pitchFamily="49" charset="0"/>
+              <a:cs typeface="Courier New" panose="02070309020205020404" pitchFamily="49" charset="0"/>
+            </a:endParaRPr>
+          </a:p>
+          <a:p>
+            <a:r>
+              <a:rPr lang="en-IE" dirty="0"/>
+              <a:t>scan for networks: </a:t>
+            </a:r>
+            <a:r>
+              <a:rPr lang="en-IE" sz="2000" dirty="0" err="1">
+                <a:highlight>
+                  <a:srgbClr val="C0C0C0"/>
+                </a:highlight>
+                <a:latin typeface="Courier New" panose="02070309020205020404" pitchFamily="49" charset="0"/>
+                <a:cs typeface="Courier New" panose="02070309020205020404" pitchFamily="49" charset="0"/>
+              </a:rPr>
+              <a:t>nmcli</a:t>
+            </a:r>
+            <a:r>
+              <a:rPr lang="en-IE" sz="2000" dirty="0">
+                <a:highlight>
+                  <a:srgbClr val="C0C0C0"/>
+                </a:highlight>
+                <a:latin typeface="Courier New" panose="02070309020205020404" pitchFamily="49" charset="0"/>
+                <a:cs typeface="Courier New" panose="02070309020205020404" pitchFamily="49" charset="0"/>
+              </a:rPr>
+              <a:t> device </a:t>
+            </a:r>
+            <a:r>
+              <a:rPr lang="en-IE" sz="2000" dirty="0" err="1">
+                <a:highlight>
+                  <a:srgbClr val="C0C0C0"/>
+                </a:highlight>
+                <a:latin typeface="Courier New" panose="02070309020205020404" pitchFamily="49" charset="0"/>
+                <a:cs typeface="Courier New" panose="02070309020205020404" pitchFamily="49" charset="0"/>
+              </a:rPr>
+              <a:t>wifi</a:t>
+            </a:r>
+            <a:r>
+              <a:rPr lang="en-IE" sz="2000" dirty="0">
+                <a:highlight>
+                  <a:srgbClr val="C0C0C0"/>
+                </a:highlight>
+                <a:latin typeface="Courier New" panose="02070309020205020404" pitchFamily="49" charset="0"/>
+                <a:cs typeface="Courier New" panose="02070309020205020404" pitchFamily="49" charset="0"/>
+              </a:rPr>
+              <a:t> list</a:t>
+            </a:r>
+            <a:endParaRPr lang="en-IE" dirty="0">
+              <a:highlight>
+                <a:srgbClr val="C0C0C0"/>
+              </a:highlight>
+              <a:latin typeface="Courier New" panose="02070309020205020404" pitchFamily="49" charset="0"/>
+              <a:cs typeface="Courier New" panose="02070309020205020404" pitchFamily="49" charset="0"/>
+            </a:endParaRPr>
+          </a:p>
+          <a:p>
+            <a:r>
+              <a:rPr lang="en-IE" dirty="0"/>
+              <a:t>Connect</a:t>
+            </a:r>
+            <a:r>
+              <a:rPr lang="en-IE" dirty="0">
+                <a:highlight>
+                  <a:srgbClr val="C0C0C0"/>
+                </a:highlight>
+                <a:latin typeface="Courier New" panose="02070309020205020404" pitchFamily="49" charset="0"/>
+                <a:cs typeface="Courier New" panose="02070309020205020404" pitchFamily="49" charset="0"/>
+              </a:rPr>
+              <a:t>: </a:t>
+            </a:r>
+            <a:r>
+              <a:rPr lang="en-IE" sz="2000" dirty="0" err="1">
+                <a:highlight>
+                  <a:srgbClr val="C0C0C0"/>
+                </a:highlight>
+                <a:latin typeface="Courier New" panose="02070309020205020404" pitchFamily="49" charset="0"/>
+                <a:cs typeface="Courier New" panose="02070309020205020404" pitchFamily="49" charset="0"/>
+              </a:rPr>
+              <a:t>sudo</a:t>
+            </a:r>
+            <a:r>
+              <a:rPr lang="en-IE" sz="2000" dirty="0">
+                <a:highlight>
+                  <a:srgbClr val="C0C0C0"/>
+                </a:highlight>
+                <a:latin typeface="Courier New" panose="02070309020205020404" pitchFamily="49" charset="0"/>
+                <a:cs typeface="Courier New" panose="02070309020205020404" pitchFamily="49" charset="0"/>
+              </a:rPr>
+              <a:t> </a:t>
+            </a:r>
+            <a:r>
+              <a:rPr lang="en-IE" sz="2000" dirty="0" err="1">
+                <a:highlight>
+                  <a:srgbClr val="C0C0C0"/>
+                </a:highlight>
+                <a:latin typeface="Courier New" panose="02070309020205020404" pitchFamily="49" charset="0"/>
+                <a:cs typeface="Courier New" panose="02070309020205020404" pitchFamily="49" charset="0"/>
+              </a:rPr>
+              <a:t>nmcli</a:t>
+            </a:r>
+            <a:r>
+              <a:rPr lang="en-IE" sz="2000" dirty="0">
+                <a:highlight>
+                  <a:srgbClr val="C0C0C0"/>
+                </a:highlight>
+                <a:latin typeface="Courier New" panose="02070309020205020404" pitchFamily="49" charset="0"/>
+                <a:cs typeface="Courier New" panose="02070309020205020404" pitchFamily="49" charset="0"/>
+              </a:rPr>
+              <a:t> device </a:t>
+            </a:r>
+            <a:r>
+              <a:rPr lang="en-IE" sz="2000" dirty="0" err="1">
+                <a:highlight>
+                  <a:srgbClr val="C0C0C0"/>
+                </a:highlight>
+                <a:latin typeface="Courier New" panose="02070309020205020404" pitchFamily="49" charset="0"/>
+                <a:cs typeface="Courier New" panose="02070309020205020404" pitchFamily="49" charset="0"/>
+              </a:rPr>
+              <a:t>wifi</a:t>
+            </a:r>
+            <a:r>
+              <a:rPr lang="en-IE" sz="2000" dirty="0">
+                <a:highlight>
+                  <a:srgbClr val="C0C0C0"/>
+                </a:highlight>
+                <a:latin typeface="Courier New" panose="02070309020205020404" pitchFamily="49" charset="0"/>
+                <a:cs typeface="Courier New" panose="02070309020205020404" pitchFamily="49" charset="0"/>
+              </a:rPr>
+              <a:t> connect "SSID" password "</a:t>
+            </a:r>
+            <a:r>
+              <a:rPr lang="en-IE" sz="2000" dirty="0" err="1">
+                <a:highlight>
+                  <a:srgbClr val="C0C0C0"/>
+                </a:highlight>
+                <a:latin typeface="Courier New" panose="02070309020205020404" pitchFamily="49" charset="0"/>
+                <a:cs typeface="Courier New" panose="02070309020205020404" pitchFamily="49" charset="0"/>
+              </a:rPr>
+              <a:t>mypassword</a:t>
+            </a:r>
+            <a:r>
+              <a:rPr lang="en-IE" sz="2000" dirty="0">
+                <a:highlight>
+                  <a:srgbClr val="C0C0C0"/>
+                </a:highlight>
+                <a:latin typeface="Courier New" panose="02070309020205020404" pitchFamily="49" charset="0"/>
+                <a:cs typeface="Courier New" panose="02070309020205020404" pitchFamily="49" charset="0"/>
+              </a:rPr>
+              <a:t>"</a:t>
+            </a:r>
+          </a:p>
+          <a:p>
+            <a:r>
+              <a:rPr lang="en-IE" dirty="0"/>
+              <a:t>Modify: </a:t>
+            </a:r>
+            <a:r>
+              <a:rPr lang="en-IE" sz="1800" dirty="0" err="1">
+                <a:highlight>
+                  <a:srgbClr val="C0C0C0"/>
+                </a:highlight>
+                <a:latin typeface="Courier New" panose="02070309020205020404" pitchFamily="49" charset="0"/>
+                <a:cs typeface="Courier New" panose="02070309020205020404" pitchFamily="49" charset="0"/>
+              </a:rPr>
+              <a:t>sudo</a:t>
+            </a:r>
+            <a:r>
+              <a:rPr lang="en-IE" sz="1800" dirty="0">
+                <a:highlight>
+                  <a:srgbClr val="C0C0C0"/>
+                </a:highlight>
+                <a:latin typeface="Courier New" panose="02070309020205020404" pitchFamily="49" charset="0"/>
+                <a:cs typeface="Courier New" panose="02070309020205020404" pitchFamily="49" charset="0"/>
+              </a:rPr>
+              <a:t> </a:t>
+            </a:r>
+            <a:r>
+              <a:rPr lang="en-IE" sz="1800" dirty="0" err="1">
+                <a:highlight>
+                  <a:srgbClr val="C0C0C0"/>
+                </a:highlight>
+                <a:latin typeface="Courier New" panose="02070309020205020404" pitchFamily="49" charset="0"/>
+                <a:cs typeface="Courier New" panose="02070309020205020404" pitchFamily="49" charset="0"/>
+              </a:rPr>
+              <a:t>nmcli</a:t>
+            </a:r>
+            <a:r>
+              <a:rPr lang="en-IE" sz="1800" dirty="0">
+                <a:highlight>
+                  <a:srgbClr val="C0C0C0"/>
+                </a:highlight>
+                <a:latin typeface="Courier New" panose="02070309020205020404" pitchFamily="49" charset="0"/>
+                <a:cs typeface="Courier New" panose="02070309020205020404" pitchFamily="49" charset="0"/>
+              </a:rPr>
+              <a:t> connection modify &lt;name&gt; ipv4.addresses 192.168.1.20/24</a:t>
+            </a:r>
+            <a:endParaRPr lang="en-IE" dirty="0">
+              <a:highlight>
+                <a:srgbClr val="C0C0C0"/>
+              </a:highlight>
+              <a:latin typeface="Courier New" panose="02070309020205020404" pitchFamily="49" charset="0"/>
+              <a:cs typeface="Courier New" panose="02070309020205020404" pitchFamily="49" charset="0"/>
+            </a:endParaRPr>
+          </a:p>
+        </p:txBody>
+      </p:sp>
+    </p:spTree>
+    <p:extLst>
+      <p:ext uri="{BB962C8B-B14F-4D97-AF65-F5344CB8AC3E}">
+        <p14:creationId xmlns:p14="http://schemas.microsoft.com/office/powerpoint/2010/main" val="2805332753"/>
+      </p:ext>
+    </p:extLst>
+  </p:cSld>
+  <p:clrMapOvr>
+    <a:masterClrMapping/>
+  </p:clrMapOvr>
+</p:sld>
+</file>
+
+<file path=ppt/slides/slide23.xml><?xml version="1.0" encoding="utf-8"?>
+<p:sld xmlns:a="http://schemas.openxmlformats.org/drawingml/2006/main" xmlns:r="http://schemas.openxmlformats.org/officeDocument/2006/relationships" xmlns:p="http://schemas.openxmlformats.org/presentationml/2006/main">
+  <p:cSld>
+    <p:spTree>
+      <p:nvGrpSpPr>
+        <p:cNvPr id="1" name=""/>
+        <p:cNvGrpSpPr/>
+        <p:nvPr/>
+      </p:nvGrpSpPr>
+      <p:grpSpPr>
+        <a:xfrm>
+          <a:off x="0" y="0"/>
+          <a:ext cx="0" cy="0"/>
+          <a:chOff x="0" y="0"/>
+          <a:chExt cx="0" cy="0"/>
+        </a:xfrm>
+      </p:grpSpPr>
+      <p:sp>
+        <p:nvSpPr>
+          <p:cNvPr id="2" name="Title 1">
+            <a:extLst>
+              <a:ext uri="{FF2B5EF4-FFF2-40B4-BE49-F238E27FC236}">
+                <a16:creationId xmlns:a16="http://schemas.microsoft.com/office/drawing/2014/main" id="{11D14E50-3447-E802-5C97-0818C3D2BDCA}"/>
+              </a:ext>
+            </a:extLst>
+          </p:cNvPr>
+          <p:cNvSpPr txBox="1">
+            <a:spLocks/>
+          </p:cNvSpPr>
+          <p:nvPr/>
+        </p:nvSpPr>
+        <p:spPr>
+          <a:xfrm>
+            <a:off x="2218765" y="293782"/>
+            <a:ext cx="8229600" cy="1143000"/>
+          </a:xfrm>
+          <a:prstGeom prst="rect">
+            <a:avLst/>
+          </a:prstGeom>
+        </p:spPr>
+        <p:txBody>
+          <a:bodyPr/>
+          <a:lstStyle>
+            <a:lvl1pPr algn="ctr" defTabSz="914400" rtl="0" eaLnBrk="1" latinLnBrk="0" hangingPunct="1">
+              <a:spcBef>
+                <a:spcPct val="0"/>
+              </a:spcBef>
+              <a:buNone/>
+              <a:defRPr sz="4400" kern="1200">
+                <a:solidFill>
+                  <a:schemeClr val="tx1"/>
+                </a:solidFill>
+                <a:latin typeface="+mj-lt"/>
+                <a:ea typeface="+mj-ea"/>
+                <a:cs typeface="+mj-cs"/>
+              </a:defRPr>
+            </a:lvl1pPr>
+          </a:lstStyle>
+          <a:p>
+            <a:r>
+              <a:rPr lang="en-IE"/>
+              <a:t>Network Troubleshooting Tools</a:t>
+            </a:r>
+            <a:endParaRPr lang="en-IE" dirty="0"/>
+          </a:p>
+        </p:txBody>
+      </p:sp>
+      <p:sp>
+        <p:nvSpPr>
+          <p:cNvPr id="3" name="Content Placeholder 2">
+            <a:extLst>
+              <a:ext uri="{FF2B5EF4-FFF2-40B4-BE49-F238E27FC236}">
+                <a16:creationId xmlns:a16="http://schemas.microsoft.com/office/drawing/2014/main" id="{4F8A9DFA-0FF9-DAC2-C744-953AA88DC85A}"/>
+              </a:ext>
+            </a:extLst>
+          </p:cNvPr>
+          <p:cNvSpPr txBox="1">
+            <a:spLocks/>
+          </p:cNvSpPr>
+          <p:nvPr/>
+        </p:nvSpPr>
+        <p:spPr>
+          <a:xfrm>
+            <a:off x="605117" y="1317812"/>
+            <a:ext cx="9843247" cy="4525963"/>
+          </a:xfrm>
+          <a:prstGeom prst="rect">
+            <a:avLst/>
+          </a:prstGeom>
+        </p:spPr>
+        <p:txBody>
+          <a:bodyPr wrap="square"/>
+          <a:lstStyle>
+            <a:lvl1pPr marL="342900" indent="-342900" algn="l" defTabSz="914400" rtl="0" eaLnBrk="1" latinLnBrk="0" hangingPunct="1">
+              <a:spcBef>
+                <a:spcPct val="20000"/>
+              </a:spcBef>
+              <a:buFont typeface="Arial" pitchFamily="34" charset="0"/>
+              <a:buChar char="•"/>
+              <a:defRPr sz="3200" kern="1200">
+                <a:solidFill>
+                  <a:schemeClr val="tx1"/>
+                </a:solidFill>
+                <a:latin typeface="+mn-lt"/>
+                <a:ea typeface="+mn-ea"/>
+                <a:cs typeface="+mn-cs"/>
+              </a:defRPr>
+            </a:lvl1pPr>
+            <a:lvl2pPr marL="742950" indent="-285750" algn="l" defTabSz="914400" rtl="0" eaLnBrk="1" latinLnBrk="0" hangingPunct="1">
+              <a:spcBef>
+                <a:spcPct val="20000"/>
+              </a:spcBef>
+              <a:buFont typeface="Arial" pitchFamily="34" charset="0"/>
+              <a:buChar char="–"/>
+              <a:defRPr sz="2800" kern="1200">
+                <a:solidFill>
+                  <a:schemeClr val="tx1"/>
+                </a:solidFill>
+                <a:latin typeface="+mn-lt"/>
+                <a:ea typeface="+mn-ea"/>
+                <a:cs typeface="+mn-cs"/>
+              </a:defRPr>
+            </a:lvl2pPr>
+            <a:lvl3pPr marL="1143000" indent="-228600" algn="l" defTabSz="914400" rtl="0" eaLnBrk="1" latinLnBrk="0" hangingPunct="1">
+              <a:spcBef>
+                <a:spcPct val="20000"/>
+              </a:spcBef>
+              <a:buFont typeface="Arial" pitchFamily="34" charset="0"/>
+              <a:buChar char="•"/>
+              <a:defRPr sz="2400" kern="1200">
+                <a:solidFill>
+                  <a:schemeClr val="tx1"/>
+                </a:solidFill>
+                <a:latin typeface="+mn-lt"/>
+                <a:ea typeface="+mn-ea"/>
+                <a:cs typeface="+mn-cs"/>
+              </a:defRPr>
+            </a:lvl3pPr>
+            <a:lvl4pPr marL="1600200" indent="-228600" algn="l" defTabSz="914400" rtl="0" eaLnBrk="1" latinLnBrk="0" hangingPunct="1">
+              <a:spcBef>
+                <a:spcPct val="20000"/>
+              </a:spcBef>
+              <a:buFont typeface="Arial" pitchFamily="34" charset="0"/>
+              <a:buChar char="–"/>
+              <a:defRPr sz="2000" kern="1200">
+                <a:solidFill>
+                  <a:schemeClr val="tx1"/>
+                </a:solidFill>
+                <a:latin typeface="+mn-lt"/>
+                <a:ea typeface="+mn-ea"/>
+                <a:cs typeface="+mn-cs"/>
+              </a:defRPr>
+            </a:lvl4pPr>
+            <a:lvl5pPr marL="2057400" indent="-228600" algn="l" defTabSz="914400" rtl="0" eaLnBrk="1" latinLnBrk="0" hangingPunct="1">
+              <a:spcBef>
+                <a:spcPct val="20000"/>
+              </a:spcBef>
+              <a:buFont typeface="Arial" pitchFamily="34" charset="0"/>
+              <a:buChar char="»"/>
+              <a:defRPr sz="2000" kern="1200">
+                <a:solidFill>
+                  <a:schemeClr val="tx1"/>
+                </a:solidFill>
+                <a:latin typeface="+mn-lt"/>
+                <a:ea typeface="+mn-ea"/>
+                <a:cs typeface="+mn-cs"/>
+              </a:defRPr>
+            </a:lvl5pPr>
+            <a:lvl6pPr marL="2514600" indent="-228600" algn="l" defTabSz="914400" rtl="0" eaLnBrk="1" latinLnBrk="0" hangingPunct="1">
+              <a:spcBef>
+                <a:spcPct val="20000"/>
+              </a:spcBef>
+              <a:buFont typeface="Arial" pitchFamily="34" charset="0"/>
+              <a:buChar char="•"/>
+              <a:defRPr sz="2000" kern="1200">
+                <a:solidFill>
+                  <a:schemeClr val="tx1"/>
+                </a:solidFill>
+                <a:latin typeface="+mn-lt"/>
+                <a:ea typeface="+mn-ea"/>
+                <a:cs typeface="+mn-cs"/>
+              </a:defRPr>
+            </a:lvl6pPr>
+            <a:lvl7pPr marL="2971800" indent="-228600" algn="l" defTabSz="914400" rtl="0" eaLnBrk="1" latinLnBrk="0" hangingPunct="1">
+              <a:spcBef>
+                <a:spcPct val="20000"/>
+              </a:spcBef>
+              <a:buFont typeface="Arial" pitchFamily="34" charset="0"/>
+              <a:buChar char="•"/>
+              <a:defRPr sz="2000" kern="1200">
+                <a:solidFill>
+                  <a:schemeClr val="tx1"/>
+                </a:solidFill>
+                <a:latin typeface="+mn-lt"/>
+                <a:ea typeface="+mn-ea"/>
+                <a:cs typeface="+mn-cs"/>
+              </a:defRPr>
+            </a:lvl7pPr>
+            <a:lvl8pPr marL="3429000" indent="-228600" algn="l" defTabSz="914400" rtl="0" eaLnBrk="1" latinLnBrk="0" hangingPunct="1">
+              <a:spcBef>
+                <a:spcPct val="20000"/>
+              </a:spcBef>
+              <a:buFont typeface="Arial" pitchFamily="34" charset="0"/>
+              <a:buChar char="•"/>
+              <a:defRPr sz="2000" kern="1200">
+                <a:solidFill>
+                  <a:schemeClr val="tx1"/>
+                </a:solidFill>
+                <a:latin typeface="+mn-lt"/>
+                <a:ea typeface="+mn-ea"/>
+                <a:cs typeface="+mn-cs"/>
+              </a:defRPr>
+            </a:lvl8pPr>
+            <a:lvl9pPr marL="3886200" indent="-228600" algn="l" defTabSz="914400" rtl="0" eaLnBrk="1" latinLnBrk="0" hangingPunct="1">
+              <a:spcBef>
+                <a:spcPct val="20000"/>
+              </a:spcBef>
+              <a:buFont typeface="Arial" pitchFamily="34" charset="0"/>
+              <a:buChar char="•"/>
+              <a:defRPr sz="2000" kern="1200">
+                <a:solidFill>
+                  <a:schemeClr val="tx1"/>
+                </a:solidFill>
+                <a:latin typeface="+mn-lt"/>
+                <a:ea typeface="+mn-ea"/>
+                <a:cs typeface="+mn-cs"/>
+              </a:defRPr>
+            </a:lvl9pPr>
+          </a:lstStyle>
+          <a:p>
+            <a:endParaRPr lang="en-IE" dirty="0"/>
+          </a:p>
+          <a:p>
+            <a:r>
+              <a:rPr lang="en-IE" dirty="0"/>
+              <a:t>Test connectivity and DNS: ping, traceroute, dig, </a:t>
+            </a:r>
+            <a:r>
+              <a:rPr lang="en-IE" dirty="0" err="1"/>
+              <a:t>nslookup</a:t>
+            </a:r>
+            <a:endParaRPr lang="en-IE" dirty="0"/>
+          </a:p>
+          <a:p>
+            <a:r>
+              <a:rPr lang="en-IE" dirty="0"/>
+              <a:t>verbose logs: </a:t>
+            </a:r>
+            <a:r>
+              <a:rPr lang="en-IE" dirty="0" err="1"/>
+              <a:t>nmcli</a:t>
+            </a:r>
+            <a:r>
+              <a:rPr lang="en-IE" dirty="0"/>
+              <a:t> general logging level DEBUG </a:t>
+            </a:r>
+          </a:p>
+          <a:p>
+            <a:r>
+              <a:rPr lang="en-IE" dirty="0"/>
+              <a:t>view service logs: </a:t>
+            </a:r>
+            <a:r>
+              <a:rPr lang="en-IE" dirty="0" err="1"/>
+              <a:t>journalctl</a:t>
+            </a:r>
+            <a:r>
+              <a:rPr lang="en-IE" dirty="0"/>
+              <a:t> -u </a:t>
+            </a:r>
+            <a:r>
+              <a:rPr lang="en-IE" dirty="0" err="1"/>
+              <a:t>NetworkManager</a:t>
+            </a:r>
+            <a:r>
+              <a:rPr lang="en-IE" dirty="0"/>
+              <a:t>  </a:t>
+            </a:r>
+          </a:p>
+          <a:p>
+            <a:r>
+              <a:rPr lang="en-IE" dirty="0"/>
+              <a:t>reset connections: </a:t>
+            </a:r>
+            <a:r>
+              <a:rPr lang="en-IE" dirty="0" err="1"/>
+              <a:t>sudo</a:t>
+            </a:r>
+            <a:r>
+              <a:rPr lang="en-IE" dirty="0"/>
+              <a:t> </a:t>
+            </a:r>
+            <a:r>
+              <a:rPr lang="en-IE" dirty="0" err="1"/>
+              <a:t>systemctl</a:t>
+            </a:r>
+            <a:r>
+              <a:rPr lang="en-IE" dirty="0"/>
+              <a:t> restart </a:t>
+            </a:r>
+            <a:r>
+              <a:rPr lang="en-IE" dirty="0" err="1"/>
+              <a:t>NetworkManager</a:t>
+            </a:r>
+            <a:endParaRPr lang="en-IE" dirty="0"/>
+          </a:p>
+          <a:p>
+            <a:pPr marL="0" indent="0">
+              <a:buNone/>
+            </a:pPr>
+            <a:r>
+              <a:rPr lang="en-IE" b="1" dirty="0"/>
+              <a:t>Lots more detail at Red Hat Networking Guide for Enterprise Linux:</a:t>
+            </a:r>
+            <a:br>
+              <a:rPr lang="en-IE" b="1" dirty="0"/>
+            </a:br>
+            <a:r>
+              <a:rPr lang="en-IE" dirty="0">
+                <a:hlinkClick r:id="rId3"/>
+              </a:rPr>
+              <a:t>https://docs.redhat.com/en/documentation/red_hat_enterprise_linux/7/html/networking_guide/index</a:t>
+            </a:r>
+            <a:endParaRPr lang="en-IE" dirty="0"/>
+          </a:p>
+          <a:p>
+            <a:pPr marL="0" indent="0">
+              <a:buNone/>
+            </a:pPr>
+            <a:endParaRPr lang="en-IE" dirty="0"/>
+          </a:p>
+        </p:txBody>
+      </p:sp>
+    </p:spTree>
+    <p:extLst>
+      <p:ext uri="{BB962C8B-B14F-4D97-AF65-F5344CB8AC3E}">
+        <p14:creationId xmlns:p14="http://schemas.microsoft.com/office/powerpoint/2010/main" val="2687727636"/>
+      </p:ext>
+    </p:extLst>
+  </p:cSld>
+  <p:clrMapOvr>
+    <a:masterClrMapping/>
+  </p:clrMapOvr>
+</p:sld>
+</file>
+
+<file path=ppt/slides/slide24.xml><?xml version="1.0" encoding="utf-8"?>
+<p:sld xmlns:a="http://schemas.openxmlformats.org/drawingml/2006/main" xmlns:r="http://schemas.openxmlformats.org/officeDocument/2006/relationships" xmlns:p="http://schemas.openxmlformats.org/presentationml/2006/main">
+  <p:cSld name="Slide 16">
     <p:bg>
       <p:bgPr>
         <a:blipFill dpi="0" rotWithShape="1">
